--- a/output/wordlabs-see-3day.pptx
+++ b/output/wordlabs-see-3day.pptx
@@ -6071,7 +6071,7 @@
                 <a:ea typeface="Calibri" pitchFamily="34" charset="-122"/>
                 <a:cs typeface="Calibri" pitchFamily="34" charset="-120"/>
               </a:rPr>
-              <a:t> any problems, or will you </a:t>
+              <a:t> any problems, or will the event go ahead as planned while I </a:t>
             </a:r>
             <a:pPr algn="l" indent="0" marL="0">
               <a:buNone/>
@@ -6102,7 +6102,7 @@
                 <a:ea typeface="Calibri" pitchFamily="34" charset="-122"/>
                 <a:cs typeface="Calibri" pitchFamily="34" charset="-120"/>
               </a:rPr>
-              <a:t> the project yourself?</a:t>
+              <a:t> the preparations?</a:t>
             </a:r>
             <a:endParaRPr lang="en-US" sz="1800" dirty="0"/>
           </a:p>
@@ -7860,7 +7860,7 @@
                 <a:ea typeface="Calibri" pitchFamily="34" charset="-122"/>
                 <a:cs typeface="Calibri" pitchFamily="34" charset="-120"/>
               </a:rPr>
-              <a:t>before, in front</a:t>
+              <a:t>before, in advance</a:t>
             </a:r>
             <a:endParaRPr lang="en-US" sz="850" dirty="0"/>
           </a:p>
@@ -8845,7 +8845,7 @@
                 <a:ea typeface="Calibri" pitchFamily="34" charset="-122"/>
                 <a:cs typeface="Calibri" pitchFamily="34" charset="-120"/>
               </a:rPr>
-              <a:t>before, in front</a:t>
+              <a:t>before, in advance</a:t>
             </a:r>
             <a:endParaRPr lang="en-US" sz="850" dirty="0"/>
           </a:p>
@@ -9962,7 +9962,7 @@
                 <a:ea typeface="Calibri" pitchFamily="34" charset="-122"/>
                 <a:cs typeface="Calibri" pitchFamily="34" charset="-120"/>
               </a:rPr>
-              <a:t>before, in front</a:t>
+              <a:t>before, in advance</a:t>
             </a:r>
             <a:endParaRPr lang="en-US" sz="850" dirty="0"/>
           </a:p>
@@ -16833,7 +16833,7 @@
                 <a:ea typeface="Calibri" pitchFamily="34" charset="-122"/>
                 <a:cs typeface="Calibri" pitchFamily="34" charset="-120"/>
               </a:rPr>
-              <a:t>The manager will </a:t>
+              <a:t>The </a:t>
             </a:r>
             <a:pPr algn="l" indent="0" marL="0">
               <a:buNone/>
@@ -16850,7 +16850,7 @@
                 <a:ea typeface="Calibri" pitchFamily="34" charset="-122"/>
                 <a:cs typeface="Calibri" pitchFamily="34" charset="-120"/>
               </a:rPr>
-              <a:t>oversee</a:t>
+              <a:t>unseen</a:t>
             </a:r>
             <a:pPr algn="l" indent="0" marL="0">
               <a:buNone/>
@@ -16864,7 +16864,7 @@
                 <a:ea typeface="Calibri" pitchFamily="34" charset="-122"/>
                 <a:cs typeface="Calibri" pitchFamily="34" charset="-120"/>
               </a:rPr>
-              <a:t> the work, and we hope to </a:t>
+              <a:t> danger was worrying; however, the </a:t>
             </a:r>
             <a:pPr algn="l" indent="0" marL="0">
               <a:buNone/>
@@ -16881,7 +16881,7 @@
                 <a:ea typeface="Calibri" pitchFamily="34" charset="-122"/>
                 <a:cs typeface="Calibri" pitchFamily="34" charset="-120"/>
               </a:rPr>
-              <a:t>foresee</a:t>
+              <a:t>seeing</a:t>
             </a:r>
             <a:pPr algn="l" indent="0" marL="0">
               <a:buNone/>
@@ -16895,7 +16895,7 @@
                 <a:ea typeface="Calibri" pitchFamily="34" charset="-122"/>
                 <a:cs typeface="Calibri" pitchFamily="34" charset="-120"/>
               </a:rPr>
-              <a:t> any issues before they arise, making them </a:t>
+              <a:t> guide dog kept the woman safe, and the </a:t>
             </a:r>
             <a:pPr algn="l" indent="0" marL="0">
               <a:buNone/>
@@ -16912,7 +16912,7 @@
                 <a:ea typeface="Calibri" pitchFamily="34" charset="-122"/>
                 <a:cs typeface="Calibri" pitchFamily="34" charset="-120"/>
               </a:rPr>
-              <a:t>foreseeable</a:t>
+              <a:t>seeker</a:t>
             </a:r>
             <a:pPr algn="l" indent="0" marL="0">
               <a:buNone/>
@@ -16926,7 +16926,7 @@
                 <a:ea typeface="Calibri" pitchFamily="34" charset="-122"/>
                 <a:cs typeface="Calibri" pitchFamily="34" charset="-120"/>
               </a:rPr>
-              <a:t>.</a:t>
+              <a:t> found the missing child.</a:t>
             </a:r>
             <a:endParaRPr lang="en-US" sz="1800" dirty="0"/>
           </a:p>
@@ -17081,7 +17081,7 @@
                 <a:ea typeface="Trebuchet MS" pitchFamily="34" charset="-122"/>
                 <a:cs typeface="Trebuchet MS" pitchFamily="34" charset="-120"/>
               </a:rPr>
-              <a:t>oversee</a:t>
+              <a:t>unseen</a:t>
             </a:r>
             <a:endParaRPr lang="en-US" sz="1400" dirty="0"/>
           </a:p>
@@ -17209,7 +17209,7 @@
                 <a:ea typeface="Trebuchet MS" pitchFamily="34" charset="-122"/>
                 <a:cs typeface="Trebuchet MS" pitchFamily="34" charset="-120"/>
               </a:rPr>
-              <a:t>foresee</a:t>
+              <a:t>seeing</a:t>
             </a:r>
             <a:endParaRPr lang="en-US" sz="1400" dirty="0"/>
           </a:p>
@@ -17337,7 +17337,7 @@
                 <a:ea typeface="Trebuchet MS" pitchFamily="34" charset="-122"/>
                 <a:cs typeface="Trebuchet MS" pitchFamily="34" charset="-120"/>
               </a:rPr>
-              <a:t>foreseeable</a:t>
+              <a:t>seeker</a:t>
             </a:r>
             <a:endParaRPr lang="en-US" sz="1400" dirty="0"/>
           </a:p>
@@ -17807,7 +17807,7 @@
                 <a:ea typeface="Trebuchet MS" pitchFamily="34" charset="-122"/>
                 <a:cs typeface="Trebuchet MS" pitchFamily="34" charset="-120"/>
               </a:rPr>
-              <a:t>oversee</a:t>
+              <a:t>unseen</a:t>
             </a:r>
             <a:endParaRPr lang="en-US" sz="2800" dirty="0"/>
           </a:p>
@@ -18634,7 +18634,7 @@
                 <a:ea typeface="Trebuchet MS" pitchFamily="34" charset="-122"/>
                 <a:cs typeface="Trebuchet MS" pitchFamily="34" charset="-120"/>
               </a:rPr>
-              <a:t>oversee</a:t>
+              <a:t>unseen</a:t>
             </a:r>
             <a:endParaRPr lang="en-US" sz="2800" dirty="0"/>
           </a:p>
@@ -18714,7 +18714,7 @@
         </p:nvSpPr>
         <p:spPr>
           <a:xfrm>
-            <a:off x="2938272" y="2258568"/>
+            <a:off x="2221992" y="2258568"/>
             <a:ext cx="1828800" cy="292608"/>
           </a:xfrm>
           <a:prstGeom prst="rect">
@@ -18748,7 +18748,7 @@
         </p:nvSpPr>
         <p:spPr>
           <a:xfrm>
-            <a:off x="2938272" y="2258568"/>
+            <a:off x="2221992" y="2258568"/>
             <a:ext cx="1828800" cy="292608"/>
           </a:xfrm>
           <a:prstGeom prst="rect">
@@ -18773,7 +18773,7 @@
                 <a:ea typeface="Trebuchet MS" pitchFamily="34" charset="-122"/>
                 <a:cs typeface="Trebuchet MS" pitchFamily="34" charset="-120"/>
               </a:rPr>
-              <a:t>over</a:t>
+              <a:t>un</a:t>
             </a:r>
             <a:endParaRPr lang="en-US" sz="1300" dirty="0"/>
           </a:p>
@@ -18787,7 +18787,7 @@
         </p:nvSpPr>
         <p:spPr>
           <a:xfrm>
-            <a:off x="2938272" y="2569464"/>
+            <a:off x="2221992" y="2569464"/>
             <a:ext cx="1828800" cy="201168"/>
           </a:xfrm>
           <a:prstGeom prst="rect">
@@ -18812,7 +18812,7 @@
                 <a:ea typeface="Calibri" pitchFamily="34" charset="-122"/>
                 <a:cs typeface="Calibri" pitchFamily="34" charset="-120"/>
               </a:rPr>
-              <a:t>above, across</a:t>
+              <a:t>not</a:t>
             </a:r>
             <a:endParaRPr lang="en-US" sz="850" dirty="0"/>
           </a:p>
@@ -18826,7 +18826,7 @@
         </p:nvSpPr>
         <p:spPr>
           <a:xfrm>
-            <a:off x="5803392" y="2258568"/>
+            <a:off x="4370832" y="2258568"/>
             <a:ext cx="1828800" cy="292608"/>
           </a:xfrm>
           <a:prstGeom prst="rect">
@@ -18860,7 +18860,7 @@
         </p:nvSpPr>
         <p:spPr>
           <a:xfrm>
-            <a:off x="5803392" y="2258568"/>
+            <a:off x="4370832" y="2258568"/>
             <a:ext cx="1828800" cy="292608"/>
           </a:xfrm>
           <a:prstGeom prst="rect">
@@ -18899,7 +18899,7 @@
         </p:nvSpPr>
         <p:spPr>
           <a:xfrm>
-            <a:off x="5803392" y="2569464"/>
+            <a:off x="4370832" y="2569464"/>
             <a:ext cx="1828800" cy="201168"/>
           </a:xfrm>
           <a:prstGeom prst="rect">
@@ -18938,6 +18938,118 @@
         </p:nvSpPr>
         <p:spPr>
           <a:xfrm>
+            <a:off x="6519672" y="2258568"/>
+            <a:ext cx="1828800" cy="292608"/>
+          </a:xfrm>
+          <a:prstGeom prst="rect">
+            <a:avLst>
+              <a:gd name="adj" fmla="val 25000"/>
+            </a:avLst>
+          </a:prstGeom>
+          <a:solidFill>
+            <a:srgbClr val="FCE7F3"/>
+          </a:solidFill>
+          <a:ln w="19050">
+            <a:solidFill>
+              <a:srgbClr val="DB2777"/>
+            </a:solidFill>
+            <a:prstDash val="solid"/>
+          </a:ln>
+          <a:effectLst>
+            <a:outerShdw sx="100000" sy="100000" kx="0" ky="0" algn="bl" rotWithShape="0" blurRad="101600" dist="38100" dir="8100000">
+              <a:srgbClr val="000000">
+                <a:alpha val="12000"/>
+              </a:srgbClr>
+            </a:outerShdw>
+          </a:effectLst>
+        </p:spPr>
+      </p:sp>
+      <p:sp>
+        <p:nvSpPr>
+          <p:cNvPr id="23" name="Text 21"/>
+          <p:cNvSpPr/>
+          <p:nvPr/>
+        </p:nvSpPr>
+        <p:spPr>
+          <a:xfrm>
+            <a:off x="6519672" y="2258568"/>
+            <a:ext cx="1828800" cy="292608"/>
+          </a:xfrm>
+          <a:prstGeom prst="rect">
+            <a:avLst/>
+          </a:prstGeom>
+          <a:noFill/>
+          <a:ln/>
+        </p:spPr>
+        <p:txBody>
+          <a:bodyPr wrap="square" lIns="0" tIns="0" rIns="0" bIns="0" rtlCol="0" anchor="ctr"/>
+          <a:lstStyle/>
+          <a:p>
+            <a:pPr algn="ctr" indent="0" marL="0">
+              <a:buNone/>
+            </a:pPr>
+            <a:r>
+              <a:rPr lang="en-US" sz="1300" b="1" dirty="0">
+                <a:solidFill>
+                  <a:srgbClr val="9D174D"/>
+                </a:solidFill>
+                <a:latin typeface="Trebuchet MS" pitchFamily="34" charset="0"/>
+                <a:ea typeface="Trebuchet MS" pitchFamily="34" charset="-122"/>
+                <a:cs typeface="Trebuchet MS" pitchFamily="34" charset="-120"/>
+              </a:rPr>
+              <a:t>n</a:t>
+            </a:r>
+            <a:endParaRPr lang="en-US" sz="1300" dirty="0"/>
+          </a:p>
+        </p:txBody>
+      </p:sp>
+      <p:sp>
+        <p:nvSpPr>
+          <p:cNvPr id="24" name="Text 22"/>
+          <p:cNvSpPr/>
+          <p:nvPr/>
+        </p:nvSpPr>
+        <p:spPr>
+          <a:xfrm>
+            <a:off x="6519672" y="2569464"/>
+            <a:ext cx="1828800" cy="201168"/>
+          </a:xfrm>
+          <a:prstGeom prst="rect">
+            <a:avLst/>
+          </a:prstGeom>
+          <a:noFill/>
+          <a:ln/>
+        </p:spPr>
+        <p:txBody>
+          <a:bodyPr wrap="square" lIns="0" tIns="0" rIns="0" bIns="0" rtlCol="0" anchor="t"/>
+          <a:lstStyle/>
+          <a:p>
+            <a:pPr algn="ctr" indent="0" marL="0">
+              <a:buNone/>
+            </a:pPr>
+            <a:r>
+              <a:rPr lang="en-US" sz="850" dirty="0">
+                <a:solidFill>
+                  <a:srgbClr val="475569"/>
+                </a:solidFill>
+                <a:latin typeface="Calibri" pitchFamily="34" charset="0"/>
+                <a:ea typeface="Calibri" pitchFamily="34" charset="-122"/>
+                <a:cs typeface="Calibri" pitchFamily="34" charset="-120"/>
+              </a:rPr>
+              <a:t>past participle, showing something has been done</a:t>
+            </a:r>
+            <a:endParaRPr lang="en-US" sz="850" dirty="0"/>
+          </a:p>
+        </p:txBody>
+      </p:sp>
+      <p:sp>
+        <p:nvSpPr>
+          <p:cNvPr id="25" name="Shape 23"/>
+          <p:cNvSpPr/>
+          <p:nvPr/>
+        </p:nvSpPr>
+        <p:spPr>
+          <a:xfrm>
             <a:off x="365760" y="3273552"/>
             <a:ext cx="1371600" cy="658368"/>
           </a:xfrm>
@@ -18959,7 +19071,7 @@
       </p:sp>
       <p:sp>
         <p:nvSpPr>
-          <p:cNvPr id="23" name="Text 21"/>
+          <p:cNvPr id="26" name="Text 24"/>
           <p:cNvSpPr/>
           <p:nvPr/>
         </p:nvSpPr>
@@ -18998,7 +19110,7 @@
       </p:sp>
       <p:sp>
         <p:nvSpPr>
-          <p:cNvPr id="24" name="Shape 22"/>
+          <p:cNvPr id="27" name="Shape 25"/>
           <p:cNvSpPr/>
           <p:nvPr/>
         </p:nvSpPr>
@@ -19025,7 +19137,7 @@
       </p:sp>
       <p:sp>
         <p:nvSpPr>
-          <p:cNvPr id="25" name="Text 23"/>
+          <p:cNvPr id="28" name="Text 26"/>
           <p:cNvSpPr/>
           <p:nvPr/>
         </p:nvSpPr>
@@ -19064,7 +19176,7 @@
       </p:sp>
       <p:sp>
         <p:nvSpPr>
-          <p:cNvPr id="26" name="Shape 24"/>
+          <p:cNvPr id="29" name="Shape 27"/>
           <p:cNvSpPr/>
           <p:nvPr/>
         </p:nvSpPr>
@@ -19091,7 +19203,7 @@
       </p:sp>
       <p:sp>
         <p:nvSpPr>
-          <p:cNvPr id="27" name="Text 25"/>
+          <p:cNvPr id="30" name="Text 28"/>
           <p:cNvSpPr/>
           <p:nvPr/>
         </p:nvSpPr>
@@ -19130,7 +19242,7 @@
       </p:sp>
       <p:sp>
         <p:nvSpPr>
-          <p:cNvPr id="28" name="Shape 26"/>
+          <p:cNvPr id="31" name="Shape 29"/>
           <p:cNvSpPr/>
           <p:nvPr/>
         </p:nvSpPr>
@@ -19157,7 +19269,7 @@
       </p:sp>
       <p:sp>
         <p:nvSpPr>
-          <p:cNvPr id="29" name="Text 27"/>
+          <p:cNvPr id="32" name="Text 30"/>
           <p:cNvSpPr/>
           <p:nvPr/>
         </p:nvSpPr>
@@ -19619,7 +19731,7 @@
                 <a:ea typeface="Trebuchet MS" pitchFamily="34" charset="-122"/>
                 <a:cs typeface="Trebuchet MS" pitchFamily="34" charset="-120"/>
               </a:rPr>
-              <a:t>oversee</a:t>
+              <a:t>unseen</a:t>
             </a:r>
             <a:endParaRPr lang="en-US" sz="2800" dirty="0"/>
           </a:p>
@@ -19699,7 +19811,7 @@
         </p:nvSpPr>
         <p:spPr>
           <a:xfrm>
-            <a:off x="2938272" y="2258568"/>
+            <a:off x="2221992" y="2258568"/>
             <a:ext cx="1828800" cy="292608"/>
           </a:xfrm>
           <a:prstGeom prst="rect">
@@ -19733,7 +19845,7 @@
         </p:nvSpPr>
         <p:spPr>
           <a:xfrm>
-            <a:off x="2938272" y="2258568"/>
+            <a:off x="2221992" y="2258568"/>
             <a:ext cx="1828800" cy="292608"/>
           </a:xfrm>
           <a:prstGeom prst="rect">
@@ -19758,7 +19870,7 @@
                 <a:ea typeface="Trebuchet MS" pitchFamily="34" charset="-122"/>
                 <a:cs typeface="Trebuchet MS" pitchFamily="34" charset="-120"/>
               </a:rPr>
-              <a:t>over</a:t>
+              <a:t>un</a:t>
             </a:r>
             <a:endParaRPr lang="en-US" sz="1300" dirty="0"/>
           </a:p>
@@ -19772,7 +19884,7 @@
         </p:nvSpPr>
         <p:spPr>
           <a:xfrm>
-            <a:off x="2938272" y="2569464"/>
+            <a:off x="2221992" y="2569464"/>
             <a:ext cx="1828800" cy="201168"/>
           </a:xfrm>
           <a:prstGeom prst="rect">
@@ -19797,7 +19909,7 @@
                 <a:ea typeface="Calibri" pitchFamily="34" charset="-122"/>
                 <a:cs typeface="Calibri" pitchFamily="34" charset="-120"/>
               </a:rPr>
-              <a:t>above, across</a:t>
+              <a:t>not</a:t>
             </a:r>
             <a:endParaRPr lang="en-US" sz="850" dirty="0"/>
           </a:p>
@@ -19811,7 +19923,7 @@
         </p:nvSpPr>
         <p:spPr>
           <a:xfrm>
-            <a:off x="5803392" y="2258568"/>
+            <a:off x="4370832" y="2258568"/>
             <a:ext cx="1828800" cy="292608"/>
           </a:xfrm>
           <a:prstGeom prst="rect">
@@ -19845,7 +19957,7 @@
         </p:nvSpPr>
         <p:spPr>
           <a:xfrm>
-            <a:off x="5803392" y="2258568"/>
+            <a:off x="4370832" y="2258568"/>
             <a:ext cx="1828800" cy="292608"/>
           </a:xfrm>
           <a:prstGeom prst="rect">
@@ -19884,7 +19996,7 @@
         </p:nvSpPr>
         <p:spPr>
           <a:xfrm>
-            <a:off x="5803392" y="2569464"/>
+            <a:off x="4370832" y="2569464"/>
             <a:ext cx="1828800" cy="201168"/>
           </a:xfrm>
           <a:prstGeom prst="rect">
@@ -19923,6 +20035,118 @@
         </p:nvSpPr>
         <p:spPr>
           <a:xfrm>
+            <a:off x="6519672" y="2258568"/>
+            <a:ext cx="1828800" cy="292608"/>
+          </a:xfrm>
+          <a:prstGeom prst="rect">
+            <a:avLst>
+              <a:gd name="adj" fmla="val 25000"/>
+            </a:avLst>
+          </a:prstGeom>
+          <a:solidFill>
+            <a:srgbClr val="FCE7F3"/>
+          </a:solidFill>
+          <a:ln w="19050">
+            <a:solidFill>
+              <a:srgbClr val="DB2777"/>
+            </a:solidFill>
+            <a:prstDash val="solid"/>
+          </a:ln>
+          <a:effectLst>
+            <a:outerShdw sx="100000" sy="100000" kx="0" ky="0" algn="bl" rotWithShape="0" blurRad="101600" dist="38100" dir="8100000">
+              <a:srgbClr val="000000">
+                <a:alpha val="12000"/>
+              </a:srgbClr>
+            </a:outerShdw>
+          </a:effectLst>
+        </p:spPr>
+      </p:sp>
+      <p:sp>
+        <p:nvSpPr>
+          <p:cNvPr id="23" name="Text 21"/>
+          <p:cNvSpPr/>
+          <p:nvPr/>
+        </p:nvSpPr>
+        <p:spPr>
+          <a:xfrm>
+            <a:off x="6519672" y="2258568"/>
+            <a:ext cx="1828800" cy="292608"/>
+          </a:xfrm>
+          <a:prstGeom prst="rect">
+            <a:avLst/>
+          </a:prstGeom>
+          <a:noFill/>
+          <a:ln/>
+        </p:spPr>
+        <p:txBody>
+          <a:bodyPr wrap="square" lIns="0" tIns="0" rIns="0" bIns="0" rtlCol="0" anchor="ctr"/>
+          <a:lstStyle/>
+          <a:p>
+            <a:pPr algn="ctr" indent="0" marL="0">
+              <a:buNone/>
+            </a:pPr>
+            <a:r>
+              <a:rPr lang="en-US" sz="1300" b="1" dirty="0">
+                <a:solidFill>
+                  <a:srgbClr val="9D174D"/>
+                </a:solidFill>
+                <a:latin typeface="Trebuchet MS" pitchFamily="34" charset="0"/>
+                <a:ea typeface="Trebuchet MS" pitchFamily="34" charset="-122"/>
+                <a:cs typeface="Trebuchet MS" pitchFamily="34" charset="-120"/>
+              </a:rPr>
+              <a:t>n</a:t>
+            </a:r>
+            <a:endParaRPr lang="en-US" sz="1300" dirty="0"/>
+          </a:p>
+        </p:txBody>
+      </p:sp>
+      <p:sp>
+        <p:nvSpPr>
+          <p:cNvPr id="24" name="Text 22"/>
+          <p:cNvSpPr/>
+          <p:nvPr/>
+        </p:nvSpPr>
+        <p:spPr>
+          <a:xfrm>
+            <a:off x="6519672" y="2569464"/>
+            <a:ext cx="1828800" cy="201168"/>
+          </a:xfrm>
+          <a:prstGeom prst="rect">
+            <a:avLst/>
+          </a:prstGeom>
+          <a:noFill/>
+          <a:ln/>
+        </p:spPr>
+        <p:txBody>
+          <a:bodyPr wrap="square" lIns="0" tIns="0" rIns="0" bIns="0" rtlCol="0" anchor="t"/>
+          <a:lstStyle/>
+          <a:p>
+            <a:pPr algn="ctr" indent="0" marL="0">
+              <a:buNone/>
+            </a:pPr>
+            <a:r>
+              <a:rPr lang="en-US" sz="850" dirty="0">
+                <a:solidFill>
+                  <a:srgbClr val="475569"/>
+                </a:solidFill>
+                <a:latin typeface="Calibri" pitchFamily="34" charset="0"/>
+                <a:ea typeface="Calibri" pitchFamily="34" charset="-122"/>
+                <a:cs typeface="Calibri" pitchFamily="34" charset="-120"/>
+              </a:rPr>
+              <a:t>past participle, showing something has been done</a:t>
+            </a:r>
+            <a:endParaRPr lang="en-US" sz="850" dirty="0"/>
+          </a:p>
+        </p:txBody>
+      </p:sp>
+      <p:sp>
+        <p:nvSpPr>
+          <p:cNvPr id="25" name="Shape 23"/>
+          <p:cNvSpPr/>
+          <p:nvPr/>
+        </p:nvSpPr>
+        <p:spPr>
+          <a:xfrm>
             <a:off x="365760" y="3273552"/>
             <a:ext cx="1371600" cy="658368"/>
           </a:xfrm>
@@ -19944,7 +20168,7 @@
       </p:sp>
       <p:sp>
         <p:nvSpPr>
-          <p:cNvPr id="23" name="Text 21"/>
+          <p:cNvPr id="26" name="Text 24"/>
           <p:cNvSpPr/>
           <p:nvPr/>
         </p:nvSpPr>
@@ -19983,7 +20207,7 @@
       </p:sp>
       <p:sp>
         <p:nvSpPr>
-          <p:cNvPr id="24" name="Shape 22"/>
+          <p:cNvPr id="27" name="Shape 25"/>
           <p:cNvSpPr/>
           <p:nvPr/>
         </p:nvSpPr>
@@ -20010,13 +20234,13 @@
       </p:sp>
       <p:sp>
         <p:nvSpPr>
-          <p:cNvPr id="25" name="Shape 23"/>
-          <p:cNvSpPr/>
-          <p:nvPr/>
-        </p:nvSpPr>
-        <p:spPr>
-          <a:xfrm>
-            <a:off x="2313432" y="3364992"/>
+          <p:cNvPr id="28" name="Shape 26"/>
+          <p:cNvSpPr/>
+          <p:nvPr/>
+        </p:nvSpPr>
+        <p:spPr>
+          <a:xfrm>
+            <a:off x="2999232" y="3364992"/>
             <a:ext cx="1645920" cy="475488"/>
           </a:xfrm>
           <a:prstGeom prst="rect">
@@ -20037,13 +20261,13 @@
       </p:sp>
       <p:sp>
         <p:nvSpPr>
-          <p:cNvPr id="26" name="Text 24"/>
-          <p:cNvSpPr/>
-          <p:nvPr/>
-        </p:nvSpPr>
-        <p:spPr>
-          <a:xfrm>
-            <a:off x="2313432" y="3364992"/>
+          <p:cNvPr id="29" name="Text 27"/>
+          <p:cNvSpPr/>
+          <p:nvPr/>
+        </p:nvSpPr>
+        <p:spPr>
+          <a:xfrm>
+            <a:off x="2999232" y="3364992"/>
             <a:ext cx="1645920" cy="475488"/>
           </a:xfrm>
           <a:prstGeom prst="rect">
@@ -20068,7 +20292,7 @@
                 <a:ea typeface="Trebuchet MS" pitchFamily="34" charset="-122"/>
                 <a:cs typeface="Trebuchet MS" pitchFamily="34" charset="-120"/>
               </a:rPr>
-              <a:t>o</a:t>
+              <a:t>un</a:t>
             </a:r>
             <a:endParaRPr lang="en-US" sz="1400" dirty="0"/>
           </a:p>
@@ -20076,14 +20300,14 @@
       </p:sp>
       <p:sp>
         <p:nvSpPr>
-          <p:cNvPr id="27" name="Text 25"/>
-          <p:cNvSpPr/>
-          <p:nvPr/>
-        </p:nvSpPr>
-        <p:spPr>
-          <a:xfrm>
-            <a:off x="3959352" y="3364992"/>
-            <a:ext cx="411480" cy="475488"/>
+          <p:cNvPr id="30" name="Text 28"/>
+          <p:cNvSpPr/>
+          <p:nvPr/>
+        </p:nvSpPr>
+        <p:spPr>
+          <a:xfrm>
+            <a:off x="4645152" y="3364992"/>
+            <a:ext cx="1097280" cy="475488"/>
           </a:xfrm>
           <a:prstGeom prst="rect">
             <a:avLst/>
@@ -20115,13 +20339,13 @@
       </p:sp>
       <p:sp>
         <p:nvSpPr>
-          <p:cNvPr id="28" name="Shape 26"/>
-          <p:cNvSpPr/>
-          <p:nvPr/>
-        </p:nvSpPr>
-        <p:spPr>
-          <a:xfrm>
-            <a:off x="4370832" y="3364992"/>
+          <p:cNvPr id="31" name="Shape 29"/>
+          <p:cNvSpPr/>
+          <p:nvPr/>
+        </p:nvSpPr>
+        <p:spPr>
+          <a:xfrm>
+            <a:off x="5742432" y="3364992"/>
             <a:ext cx="1645920" cy="475488"/>
           </a:xfrm>
           <a:prstGeom prst="rect">
@@ -20142,13 +20366,13 @@
       </p:sp>
       <p:sp>
         <p:nvSpPr>
-          <p:cNvPr id="29" name="Text 27"/>
-          <p:cNvSpPr/>
-          <p:nvPr/>
-        </p:nvSpPr>
-        <p:spPr>
-          <a:xfrm>
-            <a:off x="4370832" y="3364992"/>
+          <p:cNvPr id="32" name="Text 30"/>
+          <p:cNvSpPr/>
+          <p:nvPr/>
+        </p:nvSpPr>
+        <p:spPr>
+          <a:xfrm>
+            <a:off x="5742432" y="3364992"/>
             <a:ext cx="1645920" cy="475488"/>
           </a:xfrm>
           <a:prstGeom prst="rect">
@@ -20173,112 +20397,7 @@
                 <a:ea typeface="Trebuchet MS" pitchFamily="34" charset="-122"/>
                 <a:cs typeface="Trebuchet MS" pitchFamily="34" charset="-120"/>
               </a:rPr>
-              <a:t>ver</a:t>
-            </a:r>
-            <a:endParaRPr lang="en-US" sz="1400" dirty="0"/>
-          </a:p>
-        </p:txBody>
-      </p:sp>
-      <p:sp>
-        <p:nvSpPr>
-          <p:cNvPr id="30" name="Text 28"/>
-          <p:cNvSpPr/>
-          <p:nvPr/>
-        </p:nvSpPr>
-        <p:spPr>
-          <a:xfrm>
-            <a:off x="6016752" y="3364992"/>
-            <a:ext cx="411480" cy="475488"/>
-          </a:xfrm>
-          <a:prstGeom prst="rect">
-            <a:avLst/>
-          </a:prstGeom>
-          <a:noFill/>
-          <a:ln/>
-        </p:spPr>
-        <p:txBody>
-          <a:bodyPr wrap="square" lIns="0" tIns="0" rIns="0" bIns="0" rtlCol="0" anchor="ctr"/>
-          <a:lstStyle/>
-          <a:p>
-            <a:pPr algn="ctr" indent="0" marL="0">
-              <a:buNone/>
-            </a:pPr>
-            <a:r>
-              <a:rPr lang="en-US" sz="1600" b="1" dirty="0">
-                <a:solidFill>
-                  <a:srgbClr val="0D9488"/>
-                </a:solidFill>
-                <a:latin typeface="Trebuchet MS" pitchFamily="34" charset="0"/>
-                <a:ea typeface="Trebuchet MS" pitchFamily="34" charset="-122"/>
-                <a:cs typeface="Trebuchet MS" pitchFamily="34" charset="-120"/>
-              </a:rPr>
-              <a:t>·</a:t>
-            </a:r>
-            <a:endParaRPr lang="en-US" sz="1600" dirty="0"/>
-          </a:p>
-        </p:txBody>
-      </p:sp>
-      <p:sp>
-        <p:nvSpPr>
-          <p:cNvPr id="31" name="Shape 29"/>
-          <p:cNvSpPr/>
-          <p:nvPr/>
-        </p:nvSpPr>
-        <p:spPr>
-          <a:xfrm>
-            <a:off x="6428232" y="3364992"/>
-            <a:ext cx="1645920" cy="475488"/>
-          </a:xfrm>
-          <a:prstGeom prst="rect">
-            <a:avLst>
-              <a:gd name="adj" fmla="val 9615"/>
-            </a:avLst>
-          </a:prstGeom>
-          <a:solidFill>
-            <a:srgbClr val="FFFFFF"/>
-          </a:solidFill>
-          <a:ln w="12700">
-            <a:solidFill>
-              <a:srgbClr val="0D9488"/>
-            </a:solidFill>
-            <a:prstDash val="solid"/>
-          </a:ln>
-        </p:spPr>
-      </p:sp>
-      <p:sp>
-        <p:nvSpPr>
-          <p:cNvPr id="32" name="Text 30"/>
-          <p:cNvSpPr/>
-          <p:nvPr/>
-        </p:nvSpPr>
-        <p:spPr>
-          <a:xfrm>
-            <a:off x="6428232" y="3364992"/>
-            <a:ext cx="1645920" cy="475488"/>
-          </a:xfrm>
-          <a:prstGeom prst="rect">
-            <a:avLst/>
-          </a:prstGeom>
-          <a:noFill/>
-          <a:ln/>
-        </p:spPr>
-        <p:txBody>
-          <a:bodyPr wrap="square" lIns="0" tIns="0" rIns="0" bIns="0" rtlCol="0" anchor="ctr"/>
-          <a:lstStyle/>
-          <a:p>
-            <a:pPr algn="ctr" indent="0" marL="0">
-              <a:buNone/>
-            </a:pPr>
-            <a:r>
-              <a:rPr lang="en-US" sz="1400" b="1" dirty="0">
-                <a:solidFill>
-                  <a:srgbClr val="0D9488"/>
-                </a:solidFill>
-                <a:latin typeface="Trebuchet MS" pitchFamily="34" charset="0"/>
-                <a:ea typeface="Trebuchet MS" pitchFamily="34" charset="-122"/>
-                <a:cs typeface="Trebuchet MS" pitchFamily="34" charset="-120"/>
-              </a:rPr>
-              <a:t>see</a:t>
+              <a:t>seen</a:t>
             </a:r>
             <a:endParaRPr lang="en-US" sz="1400" dirty="0"/>
           </a:p>
@@ -20841,7 +20960,7 @@
                 <a:ea typeface="Trebuchet MS" pitchFamily="34" charset="-122"/>
                 <a:cs typeface="Trebuchet MS" pitchFamily="34" charset="-120"/>
               </a:rPr>
-              <a:t>oversee</a:t>
+              <a:t>unseen</a:t>
             </a:r>
             <a:endParaRPr lang="en-US" sz="2800" dirty="0"/>
           </a:p>
@@ -20921,7 +21040,7 @@
         </p:nvSpPr>
         <p:spPr>
           <a:xfrm>
-            <a:off x="2938272" y="2258568"/>
+            <a:off x="2221992" y="2258568"/>
             <a:ext cx="1828800" cy="292608"/>
           </a:xfrm>
           <a:prstGeom prst="rect">
@@ -20955,7 +21074,7 @@
         </p:nvSpPr>
         <p:spPr>
           <a:xfrm>
-            <a:off x="2938272" y="2258568"/>
+            <a:off x="2221992" y="2258568"/>
             <a:ext cx="1828800" cy="292608"/>
           </a:xfrm>
           <a:prstGeom prst="rect">
@@ -20980,7 +21099,7 @@
                 <a:ea typeface="Trebuchet MS" pitchFamily="34" charset="-122"/>
                 <a:cs typeface="Trebuchet MS" pitchFamily="34" charset="-120"/>
               </a:rPr>
-              <a:t>over</a:t>
+              <a:t>un</a:t>
             </a:r>
             <a:endParaRPr lang="en-US" sz="1300" dirty="0"/>
           </a:p>
@@ -20994,7 +21113,7 @@
         </p:nvSpPr>
         <p:spPr>
           <a:xfrm>
-            <a:off x="2938272" y="2569464"/>
+            <a:off x="2221992" y="2569464"/>
             <a:ext cx="1828800" cy="201168"/>
           </a:xfrm>
           <a:prstGeom prst="rect">
@@ -21019,7 +21138,7 @@
                 <a:ea typeface="Calibri" pitchFamily="34" charset="-122"/>
                 <a:cs typeface="Calibri" pitchFamily="34" charset="-120"/>
               </a:rPr>
-              <a:t>above, across</a:t>
+              <a:t>not</a:t>
             </a:r>
             <a:endParaRPr lang="en-US" sz="850" dirty="0"/>
           </a:p>
@@ -21033,7 +21152,7 @@
         </p:nvSpPr>
         <p:spPr>
           <a:xfrm>
-            <a:off x="5803392" y="2258568"/>
+            <a:off x="4370832" y="2258568"/>
             <a:ext cx="1828800" cy="292608"/>
           </a:xfrm>
           <a:prstGeom prst="rect">
@@ -21067,7 +21186,7 @@
         </p:nvSpPr>
         <p:spPr>
           <a:xfrm>
-            <a:off x="5803392" y="2258568"/>
+            <a:off x="4370832" y="2258568"/>
             <a:ext cx="1828800" cy="292608"/>
           </a:xfrm>
           <a:prstGeom prst="rect">
@@ -21106,7 +21225,7 @@
         </p:nvSpPr>
         <p:spPr>
           <a:xfrm>
-            <a:off x="5803392" y="2569464"/>
+            <a:off x="4370832" y="2569464"/>
             <a:ext cx="1828800" cy="201168"/>
           </a:xfrm>
           <a:prstGeom prst="rect">
@@ -21145,6 +21264,118 @@
         </p:nvSpPr>
         <p:spPr>
           <a:xfrm>
+            <a:off x="6519672" y="2258568"/>
+            <a:ext cx="1828800" cy="292608"/>
+          </a:xfrm>
+          <a:prstGeom prst="rect">
+            <a:avLst>
+              <a:gd name="adj" fmla="val 25000"/>
+            </a:avLst>
+          </a:prstGeom>
+          <a:solidFill>
+            <a:srgbClr val="FCE7F3"/>
+          </a:solidFill>
+          <a:ln w="19050">
+            <a:solidFill>
+              <a:srgbClr val="DB2777"/>
+            </a:solidFill>
+            <a:prstDash val="solid"/>
+          </a:ln>
+          <a:effectLst>
+            <a:outerShdw sx="100000" sy="100000" kx="0" ky="0" algn="bl" rotWithShape="0" blurRad="101600" dist="38100" dir="8100000">
+              <a:srgbClr val="000000">
+                <a:alpha val="12000"/>
+              </a:srgbClr>
+            </a:outerShdw>
+          </a:effectLst>
+        </p:spPr>
+      </p:sp>
+      <p:sp>
+        <p:nvSpPr>
+          <p:cNvPr id="23" name="Text 21"/>
+          <p:cNvSpPr/>
+          <p:nvPr/>
+        </p:nvSpPr>
+        <p:spPr>
+          <a:xfrm>
+            <a:off x="6519672" y="2258568"/>
+            <a:ext cx="1828800" cy="292608"/>
+          </a:xfrm>
+          <a:prstGeom prst="rect">
+            <a:avLst/>
+          </a:prstGeom>
+          <a:noFill/>
+          <a:ln/>
+        </p:spPr>
+        <p:txBody>
+          <a:bodyPr wrap="square" lIns="0" tIns="0" rIns="0" bIns="0" rtlCol="0" anchor="ctr"/>
+          <a:lstStyle/>
+          <a:p>
+            <a:pPr algn="ctr" indent="0" marL="0">
+              <a:buNone/>
+            </a:pPr>
+            <a:r>
+              <a:rPr lang="en-US" sz="1300" b="1" dirty="0">
+                <a:solidFill>
+                  <a:srgbClr val="9D174D"/>
+                </a:solidFill>
+                <a:latin typeface="Trebuchet MS" pitchFamily="34" charset="0"/>
+                <a:ea typeface="Trebuchet MS" pitchFamily="34" charset="-122"/>
+                <a:cs typeface="Trebuchet MS" pitchFamily="34" charset="-120"/>
+              </a:rPr>
+              <a:t>n</a:t>
+            </a:r>
+            <a:endParaRPr lang="en-US" sz="1300" dirty="0"/>
+          </a:p>
+        </p:txBody>
+      </p:sp>
+      <p:sp>
+        <p:nvSpPr>
+          <p:cNvPr id="24" name="Text 22"/>
+          <p:cNvSpPr/>
+          <p:nvPr/>
+        </p:nvSpPr>
+        <p:spPr>
+          <a:xfrm>
+            <a:off x="6519672" y="2569464"/>
+            <a:ext cx="1828800" cy="201168"/>
+          </a:xfrm>
+          <a:prstGeom prst="rect">
+            <a:avLst/>
+          </a:prstGeom>
+          <a:noFill/>
+          <a:ln/>
+        </p:spPr>
+        <p:txBody>
+          <a:bodyPr wrap="square" lIns="0" tIns="0" rIns="0" bIns="0" rtlCol="0" anchor="t"/>
+          <a:lstStyle/>
+          <a:p>
+            <a:pPr algn="ctr" indent="0" marL="0">
+              <a:buNone/>
+            </a:pPr>
+            <a:r>
+              <a:rPr lang="en-US" sz="850" dirty="0">
+                <a:solidFill>
+                  <a:srgbClr val="475569"/>
+                </a:solidFill>
+                <a:latin typeface="Calibri" pitchFamily="34" charset="0"/>
+                <a:ea typeface="Calibri" pitchFamily="34" charset="-122"/>
+                <a:cs typeface="Calibri" pitchFamily="34" charset="-120"/>
+              </a:rPr>
+              <a:t>past participle, showing something has been done</a:t>
+            </a:r>
+            <a:endParaRPr lang="en-US" sz="850" dirty="0"/>
+          </a:p>
+        </p:txBody>
+      </p:sp>
+      <p:sp>
+        <p:nvSpPr>
+          <p:cNvPr id="25" name="Shape 23"/>
+          <p:cNvSpPr/>
+          <p:nvPr/>
+        </p:nvSpPr>
+        <p:spPr>
+          <a:xfrm>
             <a:off x="365760" y="3273552"/>
             <a:ext cx="1371600" cy="658368"/>
           </a:xfrm>
@@ -21166,7 +21397,7 @@
       </p:sp>
       <p:sp>
         <p:nvSpPr>
-          <p:cNvPr id="23" name="Text 21"/>
+          <p:cNvPr id="26" name="Text 24"/>
           <p:cNvSpPr/>
           <p:nvPr/>
         </p:nvSpPr>
@@ -21205,7 +21436,7 @@
       </p:sp>
       <p:sp>
         <p:nvSpPr>
-          <p:cNvPr id="24" name="Shape 22"/>
+          <p:cNvPr id="27" name="Shape 25"/>
           <p:cNvSpPr/>
           <p:nvPr/>
         </p:nvSpPr>
@@ -21232,13 +21463,13 @@
       </p:sp>
       <p:sp>
         <p:nvSpPr>
-          <p:cNvPr id="25" name="Shape 23"/>
-          <p:cNvSpPr/>
-          <p:nvPr/>
-        </p:nvSpPr>
-        <p:spPr>
-          <a:xfrm>
-            <a:off x="2313432" y="3364992"/>
+          <p:cNvPr id="28" name="Shape 26"/>
+          <p:cNvSpPr/>
+          <p:nvPr/>
+        </p:nvSpPr>
+        <p:spPr>
+          <a:xfrm>
+            <a:off x="2999232" y="3364992"/>
             <a:ext cx="1645920" cy="475488"/>
           </a:xfrm>
           <a:prstGeom prst="rect">
@@ -21259,13 +21490,13 @@
       </p:sp>
       <p:sp>
         <p:nvSpPr>
-          <p:cNvPr id="26" name="Text 24"/>
-          <p:cNvSpPr/>
-          <p:nvPr/>
-        </p:nvSpPr>
-        <p:spPr>
-          <a:xfrm>
-            <a:off x="2313432" y="3364992"/>
+          <p:cNvPr id="29" name="Text 27"/>
+          <p:cNvSpPr/>
+          <p:nvPr/>
+        </p:nvSpPr>
+        <p:spPr>
+          <a:xfrm>
+            <a:off x="2999232" y="3364992"/>
             <a:ext cx="1645920" cy="475488"/>
           </a:xfrm>
           <a:prstGeom prst="rect">
@@ -21290,7 +21521,7 @@
                 <a:ea typeface="Trebuchet MS" pitchFamily="34" charset="-122"/>
                 <a:cs typeface="Trebuchet MS" pitchFamily="34" charset="-120"/>
               </a:rPr>
-              <a:t>o</a:t>
+              <a:t>un</a:t>
             </a:r>
             <a:endParaRPr lang="en-US" sz="1400" dirty="0"/>
           </a:p>
@@ -21298,14 +21529,14 @@
       </p:sp>
       <p:sp>
         <p:nvSpPr>
-          <p:cNvPr id="27" name="Text 25"/>
-          <p:cNvSpPr/>
-          <p:nvPr/>
-        </p:nvSpPr>
-        <p:spPr>
-          <a:xfrm>
-            <a:off x="3959352" y="3364992"/>
-            <a:ext cx="411480" cy="475488"/>
+          <p:cNvPr id="30" name="Text 28"/>
+          <p:cNvSpPr/>
+          <p:nvPr/>
+        </p:nvSpPr>
+        <p:spPr>
+          <a:xfrm>
+            <a:off x="4645152" y="3364992"/>
+            <a:ext cx="1097280" cy="475488"/>
           </a:xfrm>
           <a:prstGeom prst="rect">
             <a:avLst/>
@@ -21337,13 +21568,13 @@
       </p:sp>
       <p:sp>
         <p:nvSpPr>
-          <p:cNvPr id="28" name="Shape 26"/>
-          <p:cNvSpPr/>
-          <p:nvPr/>
-        </p:nvSpPr>
-        <p:spPr>
-          <a:xfrm>
-            <a:off x="4370832" y="3364992"/>
+          <p:cNvPr id="31" name="Shape 29"/>
+          <p:cNvSpPr/>
+          <p:nvPr/>
+        </p:nvSpPr>
+        <p:spPr>
+          <a:xfrm>
+            <a:off x="5742432" y="3364992"/>
             <a:ext cx="1645920" cy="475488"/>
           </a:xfrm>
           <a:prstGeom prst="rect">
@@ -21364,13 +21595,13 @@
       </p:sp>
       <p:sp>
         <p:nvSpPr>
-          <p:cNvPr id="29" name="Text 27"/>
-          <p:cNvSpPr/>
-          <p:nvPr/>
-        </p:nvSpPr>
-        <p:spPr>
-          <a:xfrm>
-            <a:off x="4370832" y="3364992"/>
+          <p:cNvPr id="32" name="Text 30"/>
+          <p:cNvSpPr/>
+          <p:nvPr/>
+        </p:nvSpPr>
+        <p:spPr>
+          <a:xfrm>
+            <a:off x="5742432" y="3364992"/>
             <a:ext cx="1645920" cy="475488"/>
           </a:xfrm>
           <a:prstGeom prst="rect">
@@ -21395,7 +21626,7 @@
                 <a:ea typeface="Trebuchet MS" pitchFamily="34" charset="-122"/>
                 <a:cs typeface="Trebuchet MS" pitchFamily="34" charset="-120"/>
               </a:rPr>
-              <a:t>ver</a:t>
+              <a:t>seen</a:t>
             </a:r>
             <a:endParaRPr lang="en-US" sz="1400" dirty="0"/>
           </a:p>
@@ -21403,14 +21634,41 @@
       </p:sp>
       <p:sp>
         <p:nvSpPr>
-          <p:cNvPr id="30" name="Text 28"/>
-          <p:cNvSpPr/>
-          <p:nvPr/>
-        </p:nvSpPr>
-        <p:spPr>
-          <a:xfrm>
-            <a:off x="6016752" y="3364992"/>
-            <a:ext cx="411480" cy="475488"/>
+          <p:cNvPr id="33" name="Shape 31"/>
+          <p:cNvSpPr/>
+          <p:nvPr/>
+        </p:nvSpPr>
+        <p:spPr>
+          <a:xfrm>
+            <a:off x="365760" y="4096512"/>
+            <a:ext cx="1371600" cy="804672"/>
+          </a:xfrm>
+          <a:prstGeom prst="rect">
+            <a:avLst>
+              <a:gd name="adj" fmla="val 6818"/>
+            </a:avLst>
+          </a:prstGeom>
+          <a:solidFill>
+            <a:srgbClr val="E2E8F0"/>
+          </a:solidFill>
+          <a:ln w="12700">
+            <a:solidFill>
+              <a:srgbClr val="E2E8F0"/>
+            </a:solidFill>
+            <a:prstDash val="solid"/>
+          </a:ln>
+        </p:spPr>
+      </p:sp>
+      <p:sp>
+        <p:nvSpPr>
+          <p:cNvPr id="34" name="Text 32"/>
+          <p:cNvSpPr/>
+          <p:nvPr/>
+        </p:nvSpPr>
+        <p:spPr>
+          <a:xfrm>
+            <a:off x="365760" y="4096512"/>
+            <a:ext cx="1371600" cy="804672"/>
           </a:xfrm>
           <a:prstGeom prst="rect">
             <a:avLst/>
@@ -21426,57 +21684,84 @@
               <a:buNone/>
             </a:pPr>
             <a:r>
-              <a:rPr lang="en-US" sz="1600" b="1" dirty="0">
-                <a:solidFill>
-                  <a:srgbClr val="0D9488"/>
+              <a:rPr lang="en-US" sz="1100" b="1" dirty="0">
+                <a:solidFill>
+                  <a:srgbClr val="475569"/>
                 </a:solidFill>
                 <a:latin typeface="Trebuchet MS" pitchFamily="34" charset="0"/>
                 <a:ea typeface="Trebuchet MS" pitchFamily="34" charset="-122"/>
                 <a:cs typeface="Trebuchet MS" pitchFamily="34" charset="-120"/>
               </a:rPr>
-              <a:t>·</a:t>
-            </a:r>
-            <a:endParaRPr lang="en-US" sz="1600" dirty="0"/>
-          </a:p>
-        </p:txBody>
-      </p:sp>
-      <p:sp>
-        <p:nvSpPr>
-          <p:cNvPr id="31" name="Shape 29"/>
-          <p:cNvSpPr/>
-          <p:nvPr/>
-        </p:nvSpPr>
-        <p:spPr>
-          <a:xfrm>
-            <a:off x="6428232" y="3364992"/>
-            <a:ext cx="1645920" cy="475488"/>
+              <a:t>Phonemes</a:t>
+            </a:r>
+            <a:endParaRPr lang="en-US" sz="1100" dirty="0"/>
+          </a:p>
+        </p:txBody>
+      </p:sp>
+      <p:sp>
+        <p:nvSpPr>
+          <p:cNvPr id="35" name="Shape 33"/>
+          <p:cNvSpPr/>
+          <p:nvPr/>
+        </p:nvSpPr>
+        <p:spPr>
+          <a:xfrm>
+            <a:off x="1874520" y="4096512"/>
+            <a:ext cx="6903720" cy="658368"/>
           </a:xfrm>
           <a:prstGeom prst="rect">
             <a:avLst>
-              <a:gd name="adj" fmla="val 9615"/>
+              <a:gd name="adj" fmla="val 8333"/>
             </a:avLst>
           </a:prstGeom>
           <a:solidFill>
+            <a:srgbClr val="FCE7F3"/>
+          </a:solidFill>
+          <a:ln w="12700">
+            <a:solidFill>
+              <a:srgbClr val="DB2777"/>
+            </a:solidFill>
+            <a:prstDash val="solid"/>
+          </a:ln>
+        </p:spPr>
+      </p:sp>
+      <p:sp>
+        <p:nvSpPr>
+          <p:cNvPr id="36" name="Shape 34"/>
+          <p:cNvSpPr/>
+          <p:nvPr/>
+        </p:nvSpPr>
+        <p:spPr>
+          <a:xfrm>
+            <a:off x="2427732" y="4169664"/>
+            <a:ext cx="685800" cy="475488"/>
+          </a:xfrm>
+          <a:prstGeom prst="rect">
+            <a:avLst>
+              <a:gd name="adj" fmla="val 7692"/>
+            </a:avLst>
+          </a:prstGeom>
+          <a:solidFill>
             <a:srgbClr val="FFFFFF"/>
           </a:solidFill>
           <a:ln w="12700">
             <a:solidFill>
-              <a:srgbClr val="0D9488"/>
-            </a:solidFill>
-            <a:prstDash val="solid"/>
-          </a:ln>
-        </p:spPr>
-      </p:sp>
-      <p:sp>
-        <p:nvSpPr>
-          <p:cNvPr id="32" name="Text 30"/>
-          <p:cNvSpPr/>
-          <p:nvPr/>
-        </p:nvSpPr>
-        <p:spPr>
-          <a:xfrm>
-            <a:off x="6428232" y="3364992"/>
-            <a:ext cx="1645920" cy="475488"/>
+              <a:srgbClr val="DB2777"/>
+            </a:solidFill>
+            <a:prstDash val="solid"/>
+          </a:ln>
+        </p:spPr>
+      </p:sp>
+      <p:sp>
+        <p:nvSpPr>
+          <p:cNvPr id="37" name="Text 35"/>
+          <p:cNvSpPr/>
+          <p:nvPr/>
+        </p:nvSpPr>
+        <p:spPr>
+          <a:xfrm>
+            <a:off x="2427732" y="4169664"/>
+            <a:ext cx="685800" cy="475488"/>
           </a:xfrm>
           <a:prstGeom prst="rect">
             <a:avLst/>
@@ -21492,57 +21777,57 @@
               <a:buNone/>
             </a:pPr>
             <a:r>
-              <a:rPr lang="en-US" sz="1400" b="1" dirty="0">
-                <a:solidFill>
-                  <a:srgbClr val="0D9488"/>
+              <a:rPr lang="en-US" sz="900" b="1" dirty="0">
+                <a:solidFill>
+                  <a:srgbClr val="9D174D"/>
                 </a:solidFill>
                 <a:latin typeface="Trebuchet MS" pitchFamily="34" charset="0"/>
                 <a:ea typeface="Trebuchet MS" pitchFamily="34" charset="-122"/>
                 <a:cs typeface="Trebuchet MS" pitchFamily="34" charset="-120"/>
               </a:rPr>
-              <a:t>see</a:t>
-            </a:r>
-            <a:endParaRPr lang="en-US" sz="1400" dirty="0"/>
-          </a:p>
-        </p:txBody>
-      </p:sp>
-      <p:sp>
-        <p:nvSpPr>
-          <p:cNvPr id="33" name="Shape 31"/>
-          <p:cNvSpPr/>
-          <p:nvPr/>
-        </p:nvSpPr>
-        <p:spPr>
-          <a:xfrm>
-            <a:off x="365760" y="4096512"/>
-            <a:ext cx="1371600" cy="804672"/>
+              <a:t>u</a:t>
+            </a:r>
+            <a:endParaRPr lang="en-US" sz="900" dirty="0"/>
+          </a:p>
+        </p:txBody>
+      </p:sp>
+      <p:sp>
+        <p:nvSpPr>
+          <p:cNvPr id="38" name="Shape 36"/>
+          <p:cNvSpPr/>
+          <p:nvPr/>
+        </p:nvSpPr>
+        <p:spPr>
+          <a:xfrm>
+            <a:off x="3639312" y="4169664"/>
+            <a:ext cx="685800" cy="475488"/>
           </a:xfrm>
           <a:prstGeom prst="rect">
             <a:avLst>
-              <a:gd name="adj" fmla="val 6818"/>
+              <a:gd name="adj" fmla="val 7692"/>
             </a:avLst>
           </a:prstGeom>
           <a:solidFill>
-            <a:srgbClr val="E2E8F0"/>
-          </a:solidFill>
-          <a:ln w="12700">
-            <a:solidFill>
-              <a:srgbClr val="E2E8F0"/>
-            </a:solidFill>
-            <a:prstDash val="solid"/>
-          </a:ln>
-        </p:spPr>
-      </p:sp>
-      <p:sp>
-        <p:nvSpPr>
-          <p:cNvPr id="34" name="Text 32"/>
-          <p:cNvSpPr/>
-          <p:nvPr/>
-        </p:nvSpPr>
-        <p:spPr>
-          <a:xfrm>
-            <a:off x="365760" y="4096512"/>
-            <a:ext cx="1371600" cy="804672"/>
+            <a:srgbClr val="FFFFFF"/>
+          </a:solidFill>
+          <a:ln w="12700">
+            <a:solidFill>
+              <a:srgbClr val="DB2777"/>
+            </a:solidFill>
+            <a:prstDash val="solid"/>
+          </a:ln>
+        </p:spPr>
+      </p:sp>
+      <p:sp>
+        <p:nvSpPr>
+          <p:cNvPr id="39" name="Text 37"/>
+          <p:cNvSpPr/>
+          <p:nvPr/>
+        </p:nvSpPr>
+        <p:spPr>
+          <a:xfrm>
+            <a:off x="3639312" y="4169664"/>
+            <a:ext cx="685800" cy="475488"/>
           </a:xfrm>
           <a:prstGeom prst="rect">
             <a:avLst/>
@@ -21558,56 +21843,29 @@
               <a:buNone/>
             </a:pPr>
             <a:r>
-              <a:rPr lang="en-US" sz="1100" b="1" dirty="0">
-                <a:solidFill>
-                  <a:srgbClr val="475569"/>
+              <a:rPr lang="en-US" sz="900" b="1" dirty="0">
+                <a:solidFill>
+                  <a:srgbClr val="9D174D"/>
                 </a:solidFill>
                 <a:latin typeface="Trebuchet MS" pitchFamily="34" charset="0"/>
                 <a:ea typeface="Trebuchet MS" pitchFamily="34" charset="-122"/>
                 <a:cs typeface="Trebuchet MS" pitchFamily="34" charset="-120"/>
               </a:rPr>
-              <a:t>Phonemes</a:t>
-            </a:r>
-            <a:endParaRPr lang="en-US" sz="1100" dirty="0"/>
-          </a:p>
-        </p:txBody>
-      </p:sp>
-      <p:sp>
-        <p:nvSpPr>
-          <p:cNvPr id="35" name="Shape 33"/>
-          <p:cNvSpPr/>
-          <p:nvPr/>
-        </p:nvSpPr>
-        <p:spPr>
-          <a:xfrm>
-            <a:off x="1874520" y="4096512"/>
-            <a:ext cx="6903720" cy="658368"/>
-          </a:xfrm>
-          <a:prstGeom prst="rect">
-            <a:avLst>
-              <a:gd name="adj" fmla="val 8333"/>
-            </a:avLst>
-          </a:prstGeom>
-          <a:solidFill>
-            <a:srgbClr val="FCE7F3"/>
-          </a:solidFill>
-          <a:ln w="12700">
-            <a:solidFill>
-              <a:srgbClr val="DB2777"/>
-            </a:solidFill>
-            <a:prstDash val="solid"/>
-          </a:ln>
-        </p:spPr>
-      </p:sp>
-      <p:sp>
-        <p:nvSpPr>
-          <p:cNvPr id="36" name="Shape 34"/>
-          <p:cNvSpPr/>
-          <p:nvPr/>
-        </p:nvSpPr>
-        <p:spPr>
-          <a:xfrm>
-            <a:off x="2427732" y="4169664"/>
+              <a:t>n</a:t>
+            </a:r>
+            <a:endParaRPr lang="en-US" sz="900" dirty="0"/>
+          </a:p>
+        </p:txBody>
+      </p:sp>
+      <p:sp>
+        <p:nvSpPr>
+          <p:cNvPr id="40" name="Shape 38"/>
+          <p:cNvSpPr/>
+          <p:nvPr/>
+        </p:nvSpPr>
+        <p:spPr>
+          <a:xfrm>
+            <a:off x="4850892" y="4169664"/>
             <a:ext cx="685800" cy="475488"/>
           </a:xfrm>
           <a:prstGeom prst="rect">
@@ -21628,13 +21886,13 @@
       </p:sp>
       <p:sp>
         <p:nvSpPr>
-          <p:cNvPr id="37" name="Text 35"/>
-          <p:cNvSpPr/>
-          <p:nvPr/>
-        </p:nvSpPr>
-        <p:spPr>
-          <a:xfrm>
-            <a:off x="2427732" y="4169664"/>
+          <p:cNvPr id="41" name="Text 39"/>
+          <p:cNvSpPr/>
+          <p:nvPr/>
+        </p:nvSpPr>
+        <p:spPr>
+          <a:xfrm>
+            <a:off x="4850892" y="4169664"/>
             <a:ext cx="685800" cy="475488"/>
           </a:xfrm>
           <a:prstGeom prst="rect">
@@ -21659,7 +21917,7 @@
                 <a:ea typeface="Trebuchet MS" pitchFamily="34" charset="-122"/>
                 <a:cs typeface="Trebuchet MS" pitchFamily="34" charset="-120"/>
               </a:rPr>
-              <a:t>o</a:t>
+              <a:t>s</a:t>
             </a:r>
             <a:endParaRPr lang="en-US" sz="900" dirty="0"/>
           </a:p>
@@ -21667,13 +21925,13 @@
       </p:sp>
       <p:sp>
         <p:nvSpPr>
-          <p:cNvPr id="38" name="Shape 36"/>
-          <p:cNvSpPr/>
-          <p:nvPr/>
-        </p:nvSpPr>
-        <p:spPr>
-          <a:xfrm>
-            <a:off x="3639312" y="4169664"/>
+          <p:cNvPr id="42" name="Shape 40"/>
+          <p:cNvSpPr/>
+          <p:nvPr/>
+        </p:nvSpPr>
+        <p:spPr>
+          <a:xfrm>
+            <a:off x="6062472" y="4169664"/>
             <a:ext cx="685800" cy="475488"/>
           </a:xfrm>
           <a:prstGeom prst="rect">
@@ -21694,13 +21952,13 @@
       </p:sp>
       <p:sp>
         <p:nvSpPr>
-          <p:cNvPr id="39" name="Text 37"/>
-          <p:cNvSpPr/>
-          <p:nvPr/>
-        </p:nvSpPr>
-        <p:spPr>
-          <a:xfrm>
-            <a:off x="3639312" y="4169664"/>
+          <p:cNvPr id="43" name="Text 41"/>
+          <p:cNvSpPr/>
+          <p:nvPr/>
+        </p:nvSpPr>
+        <p:spPr>
+          <a:xfrm>
+            <a:off x="6062472" y="4169664"/>
             <a:ext cx="685800" cy="475488"/>
           </a:xfrm>
           <a:prstGeom prst="rect">
@@ -21725,7 +21983,7 @@
                 <a:ea typeface="Trebuchet MS" pitchFamily="34" charset="-122"/>
                 <a:cs typeface="Trebuchet MS" pitchFamily="34" charset="-120"/>
               </a:rPr>
-              <a:t>v</a:t>
+              <a:t>ee</a:t>
             </a:r>
             <a:endParaRPr lang="en-US" sz="900" dirty="0"/>
           </a:p>
@@ -21733,13 +21991,13 @@
       </p:sp>
       <p:sp>
         <p:nvSpPr>
-          <p:cNvPr id="40" name="Shape 38"/>
-          <p:cNvSpPr/>
-          <p:nvPr/>
-        </p:nvSpPr>
-        <p:spPr>
-          <a:xfrm>
-            <a:off x="4850892" y="4169664"/>
+          <p:cNvPr id="44" name="Shape 42"/>
+          <p:cNvSpPr/>
+          <p:nvPr/>
+        </p:nvSpPr>
+        <p:spPr>
+          <a:xfrm>
+            <a:off x="7274052" y="4169664"/>
             <a:ext cx="685800" cy="475488"/>
           </a:xfrm>
           <a:prstGeom prst="rect">
@@ -21760,13 +22018,13 @@
       </p:sp>
       <p:sp>
         <p:nvSpPr>
-          <p:cNvPr id="41" name="Text 39"/>
-          <p:cNvSpPr/>
-          <p:nvPr/>
-        </p:nvSpPr>
-        <p:spPr>
-          <a:xfrm>
-            <a:off x="4850892" y="4169664"/>
+          <p:cNvPr id="45" name="Text 43"/>
+          <p:cNvSpPr/>
+          <p:nvPr/>
+        </p:nvSpPr>
+        <p:spPr>
+          <a:xfrm>
+            <a:off x="7274052" y="4169664"/>
             <a:ext cx="685800" cy="475488"/>
           </a:xfrm>
           <a:prstGeom prst="rect">
@@ -21791,139 +22049,7 @@
                 <a:ea typeface="Trebuchet MS" pitchFamily="34" charset="-122"/>
                 <a:cs typeface="Trebuchet MS" pitchFamily="34" charset="-120"/>
               </a:rPr>
-              <a:t>er</a:t>
-            </a:r>
-            <a:endParaRPr lang="en-US" sz="900" dirty="0"/>
-          </a:p>
-        </p:txBody>
-      </p:sp>
-      <p:sp>
-        <p:nvSpPr>
-          <p:cNvPr id="42" name="Shape 40"/>
-          <p:cNvSpPr/>
-          <p:nvPr/>
-        </p:nvSpPr>
-        <p:spPr>
-          <a:xfrm>
-            <a:off x="6062472" y="4169664"/>
-            <a:ext cx="685800" cy="475488"/>
-          </a:xfrm>
-          <a:prstGeom prst="rect">
-            <a:avLst>
-              <a:gd name="adj" fmla="val 7692"/>
-            </a:avLst>
-          </a:prstGeom>
-          <a:solidFill>
-            <a:srgbClr val="FFFFFF"/>
-          </a:solidFill>
-          <a:ln w="12700">
-            <a:solidFill>
-              <a:srgbClr val="DB2777"/>
-            </a:solidFill>
-            <a:prstDash val="solid"/>
-          </a:ln>
-        </p:spPr>
-      </p:sp>
-      <p:sp>
-        <p:nvSpPr>
-          <p:cNvPr id="43" name="Text 41"/>
-          <p:cNvSpPr/>
-          <p:nvPr/>
-        </p:nvSpPr>
-        <p:spPr>
-          <a:xfrm>
-            <a:off x="6062472" y="4169664"/>
-            <a:ext cx="685800" cy="475488"/>
-          </a:xfrm>
-          <a:prstGeom prst="rect">
-            <a:avLst/>
-          </a:prstGeom>
-          <a:noFill/>
-          <a:ln/>
-        </p:spPr>
-        <p:txBody>
-          <a:bodyPr wrap="square" lIns="0" tIns="0" rIns="0" bIns="0" rtlCol="0" anchor="ctr"/>
-          <a:lstStyle/>
-          <a:p>
-            <a:pPr algn="ctr" indent="0" marL="0">
-              <a:buNone/>
-            </a:pPr>
-            <a:r>
-              <a:rPr lang="en-US" sz="900" b="1" dirty="0">
-                <a:solidFill>
-                  <a:srgbClr val="9D174D"/>
-                </a:solidFill>
-                <a:latin typeface="Trebuchet MS" pitchFamily="34" charset="0"/>
-                <a:ea typeface="Trebuchet MS" pitchFamily="34" charset="-122"/>
-                <a:cs typeface="Trebuchet MS" pitchFamily="34" charset="-120"/>
-              </a:rPr>
-              <a:t>s</a:t>
-            </a:r>
-            <a:endParaRPr lang="en-US" sz="900" dirty="0"/>
-          </a:p>
-        </p:txBody>
-      </p:sp>
-      <p:sp>
-        <p:nvSpPr>
-          <p:cNvPr id="44" name="Shape 42"/>
-          <p:cNvSpPr/>
-          <p:nvPr/>
-        </p:nvSpPr>
-        <p:spPr>
-          <a:xfrm>
-            <a:off x="7274052" y="4169664"/>
-            <a:ext cx="685800" cy="475488"/>
-          </a:xfrm>
-          <a:prstGeom prst="rect">
-            <a:avLst>
-              <a:gd name="adj" fmla="val 7692"/>
-            </a:avLst>
-          </a:prstGeom>
-          <a:solidFill>
-            <a:srgbClr val="FFFFFF"/>
-          </a:solidFill>
-          <a:ln w="12700">
-            <a:solidFill>
-              <a:srgbClr val="DB2777"/>
-            </a:solidFill>
-            <a:prstDash val="solid"/>
-          </a:ln>
-        </p:spPr>
-      </p:sp>
-      <p:sp>
-        <p:nvSpPr>
-          <p:cNvPr id="45" name="Text 43"/>
-          <p:cNvSpPr/>
-          <p:nvPr/>
-        </p:nvSpPr>
-        <p:spPr>
-          <a:xfrm>
-            <a:off x="7274052" y="4169664"/>
-            <a:ext cx="685800" cy="475488"/>
-          </a:xfrm>
-          <a:prstGeom prst="rect">
-            <a:avLst/>
-          </a:prstGeom>
-          <a:noFill/>
-          <a:ln/>
-        </p:spPr>
-        <p:txBody>
-          <a:bodyPr wrap="square" lIns="0" tIns="0" rIns="0" bIns="0" rtlCol="0" anchor="ctr"/>
-          <a:lstStyle/>
-          <a:p>
-            <a:pPr algn="ctr" indent="0" marL="0">
-              <a:buNone/>
-            </a:pPr>
-            <a:r>
-              <a:rPr lang="en-US" sz="900" b="1" dirty="0">
-                <a:solidFill>
-                  <a:srgbClr val="9D174D"/>
-                </a:solidFill>
-                <a:latin typeface="Trebuchet MS" pitchFamily="34" charset="0"/>
-                <a:ea typeface="Trebuchet MS" pitchFamily="34" charset="-122"/>
-                <a:cs typeface="Trebuchet MS" pitchFamily="34" charset="-120"/>
-              </a:rPr>
-              <a:t>ee</a:t>
+              <a:t>n</a:t>
             </a:r>
             <a:endParaRPr lang="en-US" sz="900" dirty="0"/>
           </a:p>
@@ -22354,7 +22480,7 @@
                 <a:ea typeface="Trebuchet MS" pitchFamily="34" charset="-122"/>
                 <a:cs typeface="Trebuchet MS" pitchFamily="34" charset="-120"/>
               </a:rPr>
-              <a:t>foresee</a:t>
+              <a:t>seeing</a:t>
             </a:r>
             <a:endParaRPr lang="en-US" sz="2800" dirty="0"/>
           </a:p>
@@ -23181,7 +23307,7 @@
                 <a:ea typeface="Trebuchet MS" pitchFamily="34" charset="-122"/>
                 <a:cs typeface="Trebuchet MS" pitchFamily="34" charset="-120"/>
               </a:rPr>
-              <a:t>foresee</a:t>
+              <a:t>seeing</a:t>
             </a:r>
             <a:endParaRPr lang="en-US" sz="2800" dirty="0"/>
           </a:p>
@@ -23270,11 +23396,11 @@
             </a:avLst>
           </a:prstGeom>
           <a:solidFill>
-            <a:srgbClr val="DDD6FE"/>
+            <a:srgbClr val="CCFBF1"/>
           </a:solidFill>
           <a:ln w="19050">
             <a:solidFill>
-              <a:srgbClr val="7C3AED"/>
+              <a:srgbClr val="0D9488"/>
             </a:solidFill>
             <a:prstDash val="solid"/>
           </a:ln>
@@ -23314,13 +23440,13 @@
             <a:r>
               <a:rPr lang="en-US" sz="1300" b="1" dirty="0">
                 <a:solidFill>
-                  <a:srgbClr val="4C1D95"/>
+                  <a:srgbClr val="0F766E"/>
                 </a:solidFill>
                 <a:latin typeface="Trebuchet MS" pitchFamily="34" charset="0"/>
                 <a:ea typeface="Trebuchet MS" pitchFamily="34" charset="-122"/>
                 <a:cs typeface="Trebuchet MS" pitchFamily="34" charset="-120"/>
               </a:rPr>
-              <a:t>fore</a:t>
+              <a:t>see</a:t>
             </a:r>
             <a:endParaRPr lang="en-US" sz="1300" dirty="0"/>
           </a:p>
@@ -23359,7 +23485,7 @@
                 <a:ea typeface="Calibri" pitchFamily="34" charset="-122"/>
                 <a:cs typeface="Calibri" pitchFamily="34" charset="-120"/>
               </a:rPr>
-              <a:t>before, in front</a:t>
+              <a:t>to perceive with eyes</a:t>
             </a:r>
             <a:endParaRPr lang="en-US" sz="850" dirty="0"/>
           </a:p>
@@ -23382,11 +23508,11 @@
             </a:avLst>
           </a:prstGeom>
           <a:solidFill>
-            <a:srgbClr val="CCFBF1"/>
+            <a:srgbClr val="FCE7F3"/>
           </a:solidFill>
           <a:ln w="19050">
             <a:solidFill>
-              <a:srgbClr val="0D9488"/>
+              <a:srgbClr val="DB2777"/>
             </a:solidFill>
             <a:prstDash val="solid"/>
           </a:ln>
@@ -23426,13 +23552,13 @@
             <a:r>
               <a:rPr lang="en-US" sz="1300" b="1" dirty="0">
                 <a:solidFill>
-                  <a:srgbClr val="0F766E"/>
+                  <a:srgbClr val="9D174D"/>
                 </a:solidFill>
                 <a:latin typeface="Trebuchet MS" pitchFamily="34" charset="0"/>
                 <a:ea typeface="Trebuchet MS" pitchFamily="34" charset="-122"/>
                 <a:cs typeface="Trebuchet MS" pitchFamily="34" charset="-120"/>
               </a:rPr>
-              <a:t>see</a:t>
+              <a:t>ing</a:t>
             </a:r>
             <a:endParaRPr lang="en-US" sz="1300" dirty="0"/>
           </a:p>
@@ -23471,7 +23597,7 @@
                 <a:ea typeface="Calibri" pitchFamily="34" charset="-122"/>
                 <a:cs typeface="Calibri" pitchFamily="34" charset="-120"/>
               </a:rPr>
-              <a:t>to perceive with eyes</a:t>
+              <a:t>ongoing action</a:t>
             </a:r>
             <a:endParaRPr lang="en-US" sz="850" dirty="0"/>
           </a:p>
@@ -24885,7 +25011,7 @@
                 <a:ea typeface="Trebuchet MS" pitchFamily="34" charset="-122"/>
                 <a:cs typeface="Trebuchet MS" pitchFamily="34" charset="-120"/>
               </a:rPr>
-              <a:t>foresee</a:t>
+              <a:t>seeing</a:t>
             </a:r>
             <a:endParaRPr lang="en-US" sz="2800" dirty="0"/>
           </a:p>
@@ -24974,11 +25100,11 @@
             </a:avLst>
           </a:prstGeom>
           <a:solidFill>
-            <a:srgbClr val="DDD6FE"/>
+            <a:srgbClr val="CCFBF1"/>
           </a:solidFill>
           <a:ln w="19050">
             <a:solidFill>
-              <a:srgbClr val="7C3AED"/>
+              <a:srgbClr val="0D9488"/>
             </a:solidFill>
             <a:prstDash val="solid"/>
           </a:ln>
@@ -25018,13 +25144,13 @@
             <a:r>
               <a:rPr lang="en-US" sz="1300" b="1" dirty="0">
                 <a:solidFill>
-                  <a:srgbClr val="4C1D95"/>
+                  <a:srgbClr val="0F766E"/>
                 </a:solidFill>
                 <a:latin typeface="Trebuchet MS" pitchFamily="34" charset="0"/>
                 <a:ea typeface="Trebuchet MS" pitchFamily="34" charset="-122"/>
                 <a:cs typeface="Trebuchet MS" pitchFamily="34" charset="-120"/>
               </a:rPr>
-              <a:t>fore</a:t>
+              <a:t>see</a:t>
             </a:r>
             <a:endParaRPr lang="en-US" sz="1300" dirty="0"/>
           </a:p>
@@ -25063,7 +25189,7 @@
                 <a:ea typeface="Calibri" pitchFamily="34" charset="-122"/>
                 <a:cs typeface="Calibri" pitchFamily="34" charset="-120"/>
               </a:rPr>
-              <a:t>before, in front</a:t>
+              <a:t>to perceive with eyes</a:t>
             </a:r>
             <a:endParaRPr lang="en-US" sz="850" dirty="0"/>
           </a:p>
@@ -25086,11 +25212,11 @@
             </a:avLst>
           </a:prstGeom>
           <a:solidFill>
-            <a:srgbClr val="CCFBF1"/>
+            <a:srgbClr val="FCE7F3"/>
           </a:solidFill>
           <a:ln w="19050">
             <a:solidFill>
-              <a:srgbClr val="0D9488"/>
+              <a:srgbClr val="DB2777"/>
             </a:solidFill>
             <a:prstDash val="solid"/>
           </a:ln>
@@ -25130,13 +25256,13 @@
             <a:r>
               <a:rPr lang="en-US" sz="1300" b="1" dirty="0">
                 <a:solidFill>
-                  <a:srgbClr val="0F766E"/>
+                  <a:srgbClr val="9D174D"/>
                 </a:solidFill>
                 <a:latin typeface="Trebuchet MS" pitchFamily="34" charset="0"/>
                 <a:ea typeface="Trebuchet MS" pitchFamily="34" charset="-122"/>
                 <a:cs typeface="Trebuchet MS" pitchFamily="34" charset="-120"/>
               </a:rPr>
-              <a:t>see</a:t>
+              <a:t>ing</a:t>
             </a:r>
             <a:endParaRPr lang="en-US" sz="1300" dirty="0"/>
           </a:p>
@@ -25175,7 +25301,7 @@
                 <a:ea typeface="Calibri" pitchFamily="34" charset="-122"/>
                 <a:cs typeface="Calibri" pitchFamily="34" charset="-120"/>
               </a:rPr>
-              <a:t>to perceive with eyes</a:t>
+              <a:t>ongoing action</a:t>
             </a:r>
             <a:endParaRPr lang="en-US" sz="850" dirty="0"/>
           </a:p>
@@ -25334,7 +25460,7 @@
                 <a:ea typeface="Trebuchet MS" pitchFamily="34" charset="-122"/>
                 <a:cs typeface="Trebuchet MS" pitchFamily="34" charset="-120"/>
               </a:rPr>
-              <a:t>fore</a:t>
+              <a:t>see</a:t>
             </a:r>
             <a:endParaRPr lang="en-US" sz="1400" dirty="0"/>
           </a:p>
@@ -25439,7 +25565,7 @@
                 <a:ea typeface="Trebuchet MS" pitchFamily="34" charset="-122"/>
                 <a:cs typeface="Trebuchet MS" pitchFamily="34" charset="-120"/>
               </a:rPr>
-              <a:t>see</a:t>
+              <a:t>ing</a:t>
             </a:r>
             <a:endParaRPr lang="en-US" sz="1400" dirty="0"/>
           </a:p>
@@ -26002,7 +26128,7 @@
                 <a:ea typeface="Trebuchet MS" pitchFamily="34" charset="-122"/>
                 <a:cs typeface="Trebuchet MS" pitchFamily="34" charset="-120"/>
               </a:rPr>
-              <a:t>foresee</a:t>
+              <a:t>seeing</a:t>
             </a:r>
             <a:endParaRPr lang="en-US" sz="2800" dirty="0"/>
           </a:p>
@@ -26091,11 +26217,11 @@
             </a:avLst>
           </a:prstGeom>
           <a:solidFill>
-            <a:srgbClr val="DDD6FE"/>
+            <a:srgbClr val="CCFBF1"/>
           </a:solidFill>
           <a:ln w="19050">
             <a:solidFill>
-              <a:srgbClr val="7C3AED"/>
+              <a:srgbClr val="0D9488"/>
             </a:solidFill>
             <a:prstDash val="solid"/>
           </a:ln>
@@ -26135,13 +26261,13 @@
             <a:r>
               <a:rPr lang="en-US" sz="1300" b="1" dirty="0">
                 <a:solidFill>
-                  <a:srgbClr val="4C1D95"/>
+                  <a:srgbClr val="0F766E"/>
                 </a:solidFill>
                 <a:latin typeface="Trebuchet MS" pitchFamily="34" charset="0"/>
                 <a:ea typeface="Trebuchet MS" pitchFamily="34" charset="-122"/>
                 <a:cs typeface="Trebuchet MS" pitchFamily="34" charset="-120"/>
               </a:rPr>
-              <a:t>fore</a:t>
+              <a:t>see</a:t>
             </a:r>
             <a:endParaRPr lang="en-US" sz="1300" dirty="0"/>
           </a:p>
@@ -26180,7 +26306,7 @@
                 <a:ea typeface="Calibri" pitchFamily="34" charset="-122"/>
                 <a:cs typeface="Calibri" pitchFamily="34" charset="-120"/>
               </a:rPr>
-              <a:t>before, in front</a:t>
+              <a:t>to perceive with eyes</a:t>
             </a:r>
             <a:endParaRPr lang="en-US" sz="850" dirty="0"/>
           </a:p>
@@ -26203,11 +26329,11 @@
             </a:avLst>
           </a:prstGeom>
           <a:solidFill>
-            <a:srgbClr val="CCFBF1"/>
+            <a:srgbClr val="FCE7F3"/>
           </a:solidFill>
           <a:ln w="19050">
             <a:solidFill>
-              <a:srgbClr val="0D9488"/>
+              <a:srgbClr val="DB2777"/>
             </a:solidFill>
             <a:prstDash val="solid"/>
           </a:ln>
@@ -26247,13 +26373,13 @@
             <a:r>
               <a:rPr lang="en-US" sz="1300" b="1" dirty="0">
                 <a:solidFill>
-                  <a:srgbClr val="0F766E"/>
+                  <a:srgbClr val="9D174D"/>
                 </a:solidFill>
                 <a:latin typeface="Trebuchet MS" pitchFamily="34" charset="0"/>
                 <a:ea typeface="Trebuchet MS" pitchFamily="34" charset="-122"/>
                 <a:cs typeface="Trebuchet MS" pitchFamily="34" charset="-120"/>
               </a:rPr>
-              <a:t>see</a:t>
+              <a:t>ing</a:t>
             </a:r>
             <a:endParaRPr lang="en-US" sz="1300" dirty="0"/>
           </a:p>
@@ -26292,7 +26418,7 @@
                 <a:ea typeface="Calibri" pitchFamily="34" charset="-122"/>
                 <a:cs typeface="Calibri" pitchFamily="34" charset="-120"/>
               </a:rPr>
-              <a:t>to perceive with eyes</a:t>
+              <a:t>ongoing action</a:t>
             </a:r>
             <a:endParaRPr lang="en-US" sz="850" dirty="0"/>
           </a:p>
@@ -26451,7 +26577,7 @@
                 <a:ea typeface="Trebuchet MS" pitchFamily="34" charset="-122"/>
                 <a:cs typeface="Trebuchet MS" pitchFamily="34" charset="-120"/>
               </a:rPr>
-              <a:t>fore</a:t>
+              <a:t>see</a:t>
             </a:r>
             <a:endParaRPr lang="en-US" sz="1400" dirty="0"/>
           </a:p>
@@ -26556,7 +26682,7 @@
                 <a:ea typeface="Trebuchet MS" pitchFamily="34" charset="-122"/>
                 <a:cs typeface="Trebuchet MS" pitchFamily="34" charset="-120"/>
               </a:rPr>
-              <a:t>see</a:t>
+              <a:t>ing</a:t>
             </a:r>
             <a:endParaRPr lang="en-US" sz="1400" dirty="0"/>
           </a:p>
@@ -26715,7 +26841,7 @@
                 <a:ea typeface="Trebuchet MS" pitchFamily="34" charset="-122"/>
                 <a:cs typeface="Trebuchet MS" pitchFamily="34" charset="-120"/>
               </a:rPr>
-              <a:t>f</a:t>
+              <a:t>s</a:t>
             </a:r>
             <a:endParaRPr lang="en-US" sz="900" dirty="0"/>
           </a:p>
@@ -26781,7 +26907,7 @@
                 <a:ea typeface="Trebuchet MS" pitchFamily="34" charset="-122"/>
                 <a:cs typeface="Trebuchet MS" pitchFamily="34" charset="-120"/>
               </a:rPr>
-              <a:t>or</a:t>
+              <a:t>ee</a:t>
             </a:r>
             <a:endParaRPr lang="en-US" sz="900" dirty="0"/>
           </a:p>
@@ -26847,7 +26973,7 @@
                 <a:ea typeface="Trebuchet MS" pitchFamily="34" charset="-122"/>
                 <a:cs typeface="Trebuchet MS" pitchFamily="34" charset="-120"/>
               </a:rPr>
-              <a:t>s</a:t>
+              <a:t>i</a:t>
             </a:r>
             <a:endParaRPr lang="en-US" sz="900" dirty="0"/>
           </a:p>
@@ -26913,7 +27039,7 @@
                 <a:ea typeface="Trebuchet MS" pitchFamily="34" charset="-122"/>
                 <a:cs typeface="Trebuchet MS" pitchFamily="34" charset="-120"/>
               </a:rPr>
-              <a:t>ee</a:t>
+              <a:t>ng</a:t>
             </a:r>
             <a:endParaRPr lang="en-US" sz="900" dirty="0"/>
           </a:p>
@@ -27344,7 +27470,7 @@
                 <a:ea typeface="Trebuchet MS" pitchFamily="34" charset="-122"/>
                 <a:cs typeface="Trebuchet MS" pitchFamily="34" charset="-120"/>
               </a:rPr>
-              <a:t>foreseeable</a:t>
+              <a:t>seeker</a:t>
             </a:r>
             <a:endParaRPr lang="en-US" sz="2800" dirty="0"/>
           </a:p>
@@ -28171,7 +28297,7 @@
                 <a:ea typeface="Trebuchet MS" pitchFamily="34" charset="-122"/>
                 <a:cs typeface="Trebuchet MS" pitchFamily="34" charset="-120"/>
               </a:rPr>
-              <a:t>foreseeable</a:t>
+              <a:t>seeker</a:t>
             </a:r>
             <a:endParaRPr lang="en-US" sz="2800" dirty="0"/>
           </a:p>
@@ -28260,11 +28386,11 @@
             </a:avLst>
           </a:prstGeom>
           <a:solidFill>
-            <a:srgbClr val="DDD6FE"/>
+            <a:srgbClr val="CCFBF1"/>
           </a:solidFill>
           <a:ln w="19050">
             <a:solidFill>
-              <a:srgbClr val="7C3AED"/>
+              <a:srgbClr val="0D9488"/>
             </a:solidFill>
             <a:prstDash val="solid"/>
           </a:ln>
@@ -28304,13 +28430,13 @@
             <a:r>
               <a:rPr lang="en-US" sz="1300" b="1" dirty="0">
                 <a:solidFill>
-                  <a:srgbClr val="4C1D95"/>
+                  <a:srgbClr val="0F766E"/>
                 </a:solidFill>
                 <a:latin typeface="Trebuchet MS" pitchFamily="34" charset="0"/>
                 <a:ea typeface="Trebuchet MS" pitchFamily="34" charset="-122"/>
                 <a:cs typeface="Trebuchet MS" pitchFamily="34" charset="-120"/>
               </a:rPr>
-              <a:t>fore</a:t>
+              <a:t>see</a:t>
             </a:r>
             <a:endParaRPr lang="en-US" sz="1300" dirty="0"/>
           </a:p>
@@ -28349,7 +28475,7 @@
                 <a:ea typeface="Calibri" pitchFamily="34" charset="-122"/>
                 <a:cs typeface="Calibri" pitchFamily="34" charset="-120"/>
               </a:rPr>
-              <a:t>before, in front</a:t>
+              <a:t>to perceive with eyes</a:t>
             </a:r>
             <a:endParaRPr lang="en-US" sz="850" dirty="0"/>
           </a:p>
@@ -28372,11 +28498,11 @@
             </a:avLst>
           </a:prstGeom>
           <a:solidFill>
-            <a:srgbClr val="CCFBF1"/>
+            <a:srgbClr val="FCE7F3"/>
           </a:solidFill>
           <a:ln w="19050">
             <a:solidFill>
-              <a:srgbClr val="0D9488"/>
+              <a:srgbClr val="DB2777"/>
             </a:solidFill>
             <a:prstDash val="solid"/>
           </a:ln>
@@ -28416,13 +28542,13 @@
             <a:r>
               <a:rPr lang="en-US" sz="1300" b="1" dirty="0">
                 <a:solidFill>
-                  <a:srgbClr val="0F766E"/>
+                  <a:srgbClr val="9D174D"/>
                 </a:solidFill>
                 <a:latin typeface="Trebuchet MS" pitchFamily="34" charset="0"/>
                 <a:ea typeface="Trebuchet MS" pitchFamily="34" charset="-122"/>
                 <a:cs typeface="Trebuchet MS" pitchFamily="34" charset="-120"/>
               </a:rPr>
-              <a:t>see</a:t>
+              <a:t>k</a:t>
             </a:r>
             <a:endParaRPr lang="en-US" sz="1300" dirty="0"/>
           </a:p>
@@ -28461,7 +28587,7 @@
                 <a:ea typeface="Calibri" pitchFamily="34" charset="-122"/>
                 <a:cs typeface="Calibri" pitchFamily="34" charset="-120"/>
               </a:rPr>
-              <a:t>to perceive with eyes</a:t>
+              <a:t>variant spelling linking to seek</a:t>
             </a:r>
             <a:endParaRPr lang="en-US" sz="850" dirty="0"/>
           </a:p>
@@ -28534,7 +28660,7 @@
                 <a:ea typeface="Trebuchet MS" pitchFamily="34" charset="-122"/>
                 <a:cs typeface="Trebuchet MS" pitchFamily="34" charset="-120"/>
               </a:rPr>
-              <a:t>able</a:t>
+              <a:t>er</a:t>
             </a:r>
             <a:endParaRPr lang="en-US" sz="1300" dirty="0"/>
           </a:p>
@@ -28573,7 +28699,7 @@
                 <a:ea typeface="Calibri" pitchFamily="34" charset="-122"/>
                 <a:cs typeface="Calibri" pitchFamily="34" charset="-120"/>
               </a:rPr>
-              <a:t>able to be</a:t>
+              <a:t>a person who does something</a:t>
             </a:r>
             <a:endParaRPr lang="en-US" sz="850" dirty="0"/>
           </a:p>
@@ -28581,57 +28707,150 @@
       </p:sp>
       <p:sp>
         <p:nvSpPr>
-          <p:cNvPr id="25" name="Text 23"/>
-          <p:cNvSpPr/>
-          <p:nvPr/>
-        </p:nvSpPr>
-        <p:spPr>
-          <a:xfrm>
-            <a:off x="6519672" y="2752344"/>
-            <a:ext cx="1828800" cy="182880"/>
-          </a:xfrm>
-          <a:prstGeom prst="rect">
-            <a:avLst/>
-          </a:prstGeom>
-          <a:noFill/>
-          <a:ln/>
-        </p:spPr>
-        <p:txBody>
-          <a:bodyPr wrap="square" lIns="0" tIns="0" rIns="0" bIns="0" rtlCol="0" anchor="t"/>
-          <a:lstStyle/>
-          <a:p>
-            <a:pPr algn="ctr" indent="0" marL="0">
-              <a:buNone/>
-            </a:pPr>
-            <a:r>
-              <a:rPr lang="en-US" sz="700" i="1" dirty="0">
-                <a:solidFill>
-                  <a:srgbClr val="94A3B8"/>
+          <p:cNvPr id="25" name="Shape 23"/>
+          <p:cNvSpPr/>
+          <p:nvPr/>
+        </p:nvSpPr>
+        <p:spPr>
+          <a:xfrm>
+            <a:off x="365760" y="3273552"/>
+            <a:ext cx="1371600" cy="658368"/>
+          </a:xfrm>
+          <a:prstGeom prst="rect">
+            <a:avLst>
+              <a:gd name="adj" fmla="val 8333"/>
+            </a:avLst>
+          </a:prstGeom>
+          <a:solidFill>
+            <a:srgbClr val="E2E8F0"/>
+          </a:solidFill>
+          <a:ln w="12700">
+            <a:solidFill>
+              <a:srgbClr val="E2E8F0"/>
+            </a:solidFill>
+            <a:prstDash val="solid"/>
+          </a:ln>
+        </p:spPr>
+      </p:sp>
+      <p:sp>
+        <p:nvSpPr>
+          <p:cNvPr id="26" name="Text 24"/>
+          <p:cNvSpPr/>
+          <p:nvPr/>
+        </p:nvSpPr>
+        <p:spPr>
+          <a:xfrm>
+            <a:off x="365760" y="3273552"/>
+            <a:ext cx="1371600" cy="658368"/>
+          </a:xfrm>
+          <a:prstGeom prst="rect">
+            <a:avLst/>
+          </a:prstGeom>
+          <a:noFill/>
+          <a:ln/>
+        </p:spPr>
+        <p:txBody>
+          <a:bodyPr wrap="square" lIns="0" tIns="0" rIns="0" bIns="0" rtlCol="0" anchor="ctr"/>
+          <a:lstStyle/>
+          <a:p>
+            <a:pPr algn="ctr" indent="0" marL="0">
+              <a:buNone/>
+            </a:pPr>
+            <a:r>
+              <a:rPr lang="en-US" sz="1100" b="1" dirty="0">
+                <a:solidFill>
+                  <a:srgbClr val="475569"/>
+                </a:solidFill>
+                <a:latin typeface="Trebuchet MS" pitchFamily="34" charset="0"/>
+                <a:ea typeface="Trebuchet MS" pitchFamily="34" charset="-122"/>
+                <a:cs typeface="Trebuchet MS" pitchFamily="34" charset="-120"/>
+              </a:rPr>
+              <a:t>Syllables</a:t>
+            </a:r>
+            <a:endParaRPr lang="en-US" sz="1100" dirty="0"/>
+          </a:p>
+        </p:txBody>
+      </p:sp>
+      <p:sp>
+        <p:nvSpPr>
+          <p:cNvPr id="27" name="Shape 25"/>
+          <p:cNvSpPr/>
+          <p:nvPr/>
+        </p:nvSpPr>
+        <p:spPr>
+          <a:xfrm>
+            <a:off x="1874520" y="3273552"/>
+            <a:ext cx="6903720" cy="658368"/>
+          </a:xfrm>
+          <a:prstGeom prst="rect">
+            <a:avLst>
+              <a:gd name="adj" fmla="val 8333"/>
+            </a:avLst>
+          </a:prstGeom>
+          <a:solidFill>
+            <a:srgbClr val="F8FAFC"/>
+          </a:solidFill>
+          <a:ln w="12700">
+            <a:solidFill>
+              <a:srgbClr val="E2E8F0"/>
+            </a:solidFill>
+            <a:prstDash val="dash"/>
+          </a:ln>
+        </p:spPr>
+      </p:sp>
+      <p:sp>
+        <p:nvSpPr>
+          <p:cNvPr id="28" name="Text 26"/>
+          <p:cNvSpPr/>
+          <p:nvPr/>
+        </p:nvSpPr>
+        <p:spPr>
+          <a:xfrm>
+            <a:off x="1874520" y="3273552"/>
+            <a:ext cx="6903720" cy="658368"/>
+          </a:xfrm>
+          <a:prstGeom prst="rect">
+            <a:avLst/>
+          </a:prstGeom>
+          <a:noFill/>
+          <a:ln/>
+        </p:spPr>
+        <p:txBody>
+          <a:bodyPr wrap="square" rtlCol="0" anchor="ctr"/>
+          <a:lstStyle/>
+          <a:p>
+            <a:pPr algn="ctr" indent="0" marL="0">
+              <a:buNone/>
+            </a:pPr>
+            <a:r>
+              <a:rPr lang="en-US" sz="1100" i="1" dirty="0">
+                <a:solidFill>
+                  <a:srgbClr val="CBD5E1"/>
                 </a:solidFill>
                 <a:latin typeface="Calibri" pitchFamily="34" charset="0"/>
                 <a:ea typeface="Calibri" pitchFamily="34" charset="-122"/>
                 <a:cs typeface="Calibri" pitchFamily="34" charset="-120"/>
               </a:rPr>
-              <a:t>'e' dropped before vowel suffix</a:t>
-            </a:r>
-            <a:endParaRPr lang="en-US" sz="700" dirty="0"/>
-          </a:p>
-        </p:txBody>
-      </p:sp>
-      <p:sp>
-        <p:nvSpPr>
-          <p:cNvPr id="26" name="Shape 24"/>
-          <p:cNvSpPr/>
-          <p:nvPr/>
-        </p:nvSpPr>
-        <p:spPr>
-          <a:xfrm>
-            <a:off x="365760" y="3273552"/>
-            <a:ext cx="1371600" cy="658368"/>
+              <a:t>Write here...</a:t>
+            </a:r>
+            <a:endParaRPr lang="en-US" sz="1100" dirty="0"/>
+          </a:p>
+        </p:txBody>
+      </p:sp>
+      <p:sp>
+        <p:nvSpPr>
+          <p:cNvPr id="29" name="Shape 27"/>
+          <p:cNvSpPr/>
+          <p:nvPr/>
+        </p:nvSpPr>
+        <p:spPr>
+          <a:xfrm>
+            <a:off x="365760" y="4096512"/>
+            <a:ext cx="1371600" cy="804672"/>
           </a:xfrm>
           <a:prstGeom prst="rect">
             <a:avLst>
-              <a:gd name="adj" fmla="val 8333"/>
+              <a:gd name="adj" fmla="val 6818"/>
             </a:avLst>
           </a:prstGeom>
           <a:solidFill>
@@ -28647,14 +28866,14 @@
       </p:sp>
       <p:sp>
         <p:nvSpPr>
-          <p:cNvPr id="27" name="Text 25"/>
-          <p:cNvSpPr/>
-          <p:nvPr/>
-        </p:nvSpPr>
-        <p:spPr>
-          <a:xfrm>
-            <a:off x="365760" y="3273552"/>
-            <a:ext cx="1371600" cy="658368"/>
+          <p:cNvPr id="30" name="Text 28"/>
+          <p:cNvSpPr/>
+          <p:nvPr/>
+        </p:nvSpPr>
+        <p:spPr>
+          <a:xfrm>
+            <a:off x="365760" y="4096512"/>
+            <a:ext cx="1371600" cy="804672"/>
           </a:xfrm>
           <a:prstGeom prst="rect">
             <a:avLst/>
@@ -28678,7 +28897,7 @@
                 <a:ea typeface="Trebuchet MS" pitchFamily="34" charset="-122"/>
                 <a:cs typeface="Trebuchet MS" pitchFamily="34" charset="-120"/>
               </a:rPr>
-              <a:t>Syllables</a:t>
+              <a:t>Phonemes</a:t>
             </a:r>
             <a:endParaRPr lang="en-US" sz="1100" dirty="0"/>
           </a:p>
@@ -28686,80 +28905,14 @@
       </p:sp>
       <p:sp>
         <p:nvSpPr>
-          <p:cNvPr id="28" name="Shape 26"/>
-          <p:cNvSpPr/>
-          <p:nvPr/>
-        </p:nvSpPr>
-        <p:spPr>
-          <a:xfrm>
-            <a:off x="1874520" y="3273552"/>
-            <a:ext cx="6903720" cy="658368"/>
-          </a:xfrm>
-          <a:prstGeom prst="rect">
-            <a:avLst>
-              <a:gd name="adj" fmla="val 8333"/>
-            </a:avLst>
-          </a:prstGeom>
-          <a:solidFill>
-            <a:srgbClr val="F8FAFC"/>
-          </a:solidFill>
-          <a:ln w="12700">
-            <a:solidFill>
-              <a:srgbClr val="E2E8F0"/>
-            </a:solidFill>
-            <a:prstDash val="dash"/>
-          </a:ln>
-        </p:spPr>
-      </p:sp>
-      <p:sp>
-        <p:nvSpPr>
-          <p:cNvPr id="29" name="Text 27"/>
-          <p:cNvSpPr/>
-          <p:nvPr/>
-        </p:nvSpPr>
-        <p:spPr>
-          <a:xfrm>
-            <a:off x="1874520" y="3273552"/>
-            <a:ext cx="6903720" cy="658368"/>
-          </a:xfrm>
-          <a:prstGeom prst="rect">
-            <a:avLst/>
-          </a:prstGeom>
-          <a:noFill/>
-          <a:ln/>
-        </p:spPr>
-        <p:txBody>
-          <a:bodyPr wrap="square" rtlCol="0" anchor="ctr"/>
-          <a:lstStyle/>
-          <a:p>
-            <a:pPr algn="ctr" indent="0" marL="0">
-              <a:buNone/>
-            </a:pPr>
-            <a:r>
-              <a:rPr lang="en-US" sz="1100" i="1" dirty="0">
-                <a:solidFill>
-                  <a:srgbClr val="CBD5E1"/>
-                </a:solidFill>
-                <a:latin typeface="Calibri" pitchFamily="34" charset="0"/>
-                <a:ea typeface="Calibri" pitchFamily="34" charset="-122"/>
-                <a:cs typeface="Calibri" pitchFamily="34" charset="-120"/>
-              </a:rPr>
-              <a:t>Write here...</a:t>
-            </a:r>
-            <a:endParaRPr lang="en-US" sz="1100" dirty="0"/>
-          </a:p>
-        </p:txBody>
-      </p:sp>
-      <p:sp>
-        <p:nvSpPr>
-          <p:cNvPr id="30" name="Shape 28"/>
-          <p:cNvSpPr/>
-          <p:nvPr/>
-        </p:nvSpPr>
-        <p:spPr>
-          <a:xfrm>
-            <a:off x="365760" y="4096512"/>
-            <a:ext cx="1371600" cy="804672"/>
+          <p:cNvPr id="31" name="Shape 29"/>
+          <p:cNvSpPr/>
+          <p:nvPr/>
+        </p:nvSpPr>
+        <p:spPr>
+          <a:xfrm>
+            <a:off x="1874520" y="4096512"/>
+            <a:ext cx="6903720" cy="804672"/>
           </a:xfrm>
           <a:prstGeom prst="rect">
             <a:avLst>
@@ -28767,85 +28920,19 @@
             </a:avLst>
           </a:prstGeom>
           <a:solidFill>
-            <a:srgbClr val="E2E8F0"/>
+            <a:srgbClr val="F8FAFC"/>
           </a:solidFill>
           <a:ln w="12700">
             <a:solidFill>
               <a:srgbClr val="E2E8F0"/>
             </a:solidFill>
-            <a:prstDash val="solid"/>
-          </a:ln>
-        </p:spPr>
-      </p:sp>
-      <p:sp>
-        <p:nvSpPr>
-          <p:cNvPr id="31" name="Text 29"/>
-          <p:cNvSpPr/>
-          <p:nvPr/>
-        </p:nvSpPr>
-        <p:spPr>
-          <a:xfrm>
-            <a:off x="365760" y="4096512"/>
-            <a:ext cx="1371600" cy="804672"/>
-          </a:xfrm>
-          <a:prstGeom prst="rect">
-            <a:avLst/>
-          </a:prstGeom>
-          <a:noFill/>
-          <a:ln/>
-        </p:spPr>
-        <p:txBody>
-          <a:bodyPr wrap="square" lIns="0" tIns="0" rIns="0" bIns="0" rtlCol="0" anchor="ctr"/>
-          <a:lstStyle/>
-          <a:p>
-            <a:pPr algn="ctr" indent="0" marL="0">
-              <a:buNone/>
-            </a:pPr>
-            <a:r>
-              <a:rPr lang="en-US" sz="1100" b="1" dirty="0">
-                <a:solidFill>
-                  <a:srgbClr val="475569"/>
-                </a:solidFill>
-                <a:latin typeface="Trebuchet MS" pitchFamily="34" charset="0"/>
-                <a:ea typeface="Trebuchet MS" pitchFamily="34" charset="-122"/>
-                <a:cs typeface="Trebuchet MS" pitchFamily="34" charset="-120"/>
-              </a:rPr>
-              <a:t>Phonemes</a:t>
-            </a:r>
-            <a:endParaRPr lang="en-US" sz="1100" dirty="0"/>
-          </a:p>
-        </p:txBody>
-      </p:sp>
-      <p:sp>
-        <p:nvSpPr>
-          <p:cNvPr id="32" name="Shape 30"/>
-          <p:cNvSpPr/>
-          <p:nvPr/>
-        </p:nvSpPr>
-        <p:spPr>
-          <a:xfrm>
-            <a:off x="1874520" y="4096512"/>
-            <a:ext cx="6903720" cy="804672"/>
-          </a:xfrm>
-          <a:prstGeom prst="rect">
-            <a:avLst>
-              <a:gd name="adj" fmla="val 6818"/>
-            </a:avLst>
-          </a:prstGeom>
-          <a:solidFill>
-            <a:srgbClr val="F8FAFC"/>
-          </a:solidFill>
-          <a:ln w="12700">
-            <a:solidFill>
-              <a:srgbClr val="E2E8F0"/>
-            </a:solidFill>
             <a:prstDash val="dash"/>
           </a:ln>
         </p:spPr>
       </p:sp>
       <p:sp>
         <p:nvSpPr>
-          <p:cNvPr id="33" name="Text 31"/>
+          <p:cNvPr id="32" name="Text 30"/>
           <p:cNvSpPr/>
           <p:nvPr/>
         </p:nvSpPr>
@@ -29307,7 +29394,7 @@
                 <a:ea typeface="Trebuchet MS" pitchFamily="34" charset="-122"/>
                 <a:cs typeface="Trebuchet MS" pitchFamily="34" charset="-120"/>
               </a:rPr>
-              <a:t>foreseeable</a:t>
+              <a:t>seeker</a:t>
             </a:r>
             <a:endParaRPr lang="en-US" sz="2800" dirty="0"/>
           </a:p>
@@ -29396,11 +29483,11 @@
             </a:avLst>
           </a:prstGeom>
           <a:solidFill>
-            <a:srgbClr val="DDD6FE"/>
+            <a:srgbClr val="CCFBF1"/>
           </a:solidFill>
           <a:ln w="19050">
             <a:solidFill>
-              <a:srgbClr val="7C3AED"/>
+              <a:srgbClr val="0D9488"/>
             </a:solidFill>
             <a:prstDash val="solid"/>
           </a:ln>
@@ -29440,13 +29527,13 @@
             <a:r>
               <a:rPr lang="en-US" sz="1300" b="1" dirty="0">
                 <a:solidFill>
-                  <a:srgbClr val="4C1D95"/>
+                  <a:srgbClr val="0F766E"/>
                 </a:solidFill>
                 <a:latin typeface="Trebuchet MS" pitchFamily="34" charset="0"/>
                 <a:ea typeface="Trebuchet MS" pitchFamily="34" charset="-122"/>
                 <a:cs typeface="Trebuchet MS" pitchFamily="34" charset="-120"/>
               </a:rPr>
-              <a:t>fore</a:t>
+              <a:t>see</a:t>
             </a:r>
             <a:endParaRPr lang="en-US" sz="1300" dirty="0"/>
           </a:p>
@@ -29485,7 +29572,7 @@
                 <a:ea typeface="Calibri" pitchFamily="34" charset="-122"/>
                 <a:cs typeface="Calibri" pitchFamily="34" charset="-120"/>
               </a:rPr>
-              <a:t>before, in front</a:t>
+              <a:t>to perceive with eyes</a:t>
             </a:r>
             <a:endParaRPr lang="en-US" sz="850" dirty="0"/>
           </a:p>
@@ -29508,11 +29595,11 @@
             </a:avLst>
           </a:prstGeom>
           <a:solidFill>
-            <a:srgbClr val="CCFBF1"/>
+            <a:srgbClr val="FCE7F3"/>
           </a:solidFill>
           <a:ln w="19050">
             <a:solidFill>
-              <a:srgbClr val="0D9488"/>
+              <a:srgbClr val="DB2777"/>
             </a:solidFill>
             <a:prstDash val="solid"/>
           </a:ln>
@@ -29552,13 +29639,13 @@
             <a:r>
               <a:rPr lang="en-US" sz="1300" b="1" dirty="0">
                 <a:solidFill>
-                  <a:srgbClr val="0F766E"/>
+                  <a:srgbClr val="9D174D"/>
                 </a:solidFill>
                 <a:latin typeface="Trebuchet MS" pitchFamily="34" charset="0"/>
                 <a:ea typeface="Trebuchet MS" pitchFamily="34" charset="-122"/>
                 <a:cs typeface="Trebuchet MS" pitchFamily="34" charset="-120"/>
               </a:rPr>
-              <a:t>see</a:t>
+              <a:t>k</a:t>
             </a:r>
             <a:endParaRPr lang="en-US" sz="1300" dirty="0"/>
           </a:p>
@@ -29597,7 +29684,7 @@
                 <a:ea typeface="Calibri" pitchFamily="34" charset="-122"/>
                 <a:cs typeface="Calibri" pitchFamily="34" charset="-120"/>
               </a:rPr>
-              <a:t>to perceive with eyes</a:t>
+              <a:t>variant spelling linking to seek</a:t>
             </a:r>
             <a:endParaRPr lang="en-US" sz="850" dirty="0"/>
           </a:p>
@@ -29670,7 +29757,7 @@
                 <a:ea typeface="Trebuchet MS" pitchFamily="34" charset="-122"/>
                 <a:cs typeface="Trebuchet MS" pitchFamily="34" charset="-120"/>
               </a:rPr>
-              <a:t>able</a:t>
+              <a:t>er</a:t>
             </a:r>
             <a:endParaRPr lang="en-US" sz="1300" dirty="0"/>
           </a:p>
@@ -29709,7 +29796,7 @@
                 <a:ea typeface="Calibri" pitchFamily="34" charset="-122"/>
                 <a:cs typeface="Calibri" pitchFamily="34" charset="-120"/>
               </a:rPr>
-              <a:t>able to be</a:t>
+              <a:t>a person who does something</a:t>
             </a:r>
             <a:endParaRPr lang="en-US" sz="850" dirty="0"/>
           </a:p>
@@ -29717,46 +29804,7 @@
       </p:sp>
       <p:sp>
         <p:nvSpPr>
-          <p:cNvPr id="25" name="Text 23"/>
-          <p:cNvSpPr/>
-          <p:nvPr/>
-        </p:nvSpPr>
-        <p:spPr>
-          <a:xfrm>
-            <a:off x="6519672" y="2752344"/>
-            <a:ext cx="1828800" cy="182880"/>
-          </a:xfrm>
-          <a:prstGeom prst="rect">
-            <a:avLst/>
-          </a:prstGeom>
-          <a:noFill/>
-          <a:ln/>
-        </p:spPr>
-        <p:txBody>
-          <a:bodyPr wrap="square" lIns="0" tIns="0" rIns="0" bIns="0" rtlCol="0" anchor="t"/>
-          <a:lstStyle/>
-          <a:p>
-            <a:pPr algn="ctr" indent="0" marL="0">
-              <a:buNone/>
-            </a:pPr>
-            <a:r>
-              <a:rPr lang="en-US" sz="700" i="1" dirty="0">
-                <a:solidFill>
-                  <a:srgbClr val="94A3B8"/>
-                </a:solidFill>
-                <a:latin typeface="Calibri" pitchFamily="34" charset="0"/>
-                <a:ea typeface="Calibri" pitchFamily="34" charset="-122"/>
-                <a:cs typeface="Calibri" pitchFamily="34" charset="-120"/>
-              </a:rPr>
-              <a:t>'e' dropped before vowel suffix</a:t>
-            </a:r>
-            <a:endParaRPr lang="en-US" sz="700" dirty="0"/>
-          </a:p>
-        </p:txBody>
-      </p:sp>
-      <p:sp>
-        <p:nvSpPr>
-          <p:cNvPr id="26" name="Shape 24"/>
+          <p:cNvPr id="25" name="Shape 23"/>
           <p:cNvSpPr/>
           <p:nvPr/>
         </p:nvSpPr>
@@ -29783,7 +29831,7 @@
       </p:sp>
       <p:sp>
         <p:nvSpPr>
-          <p:cNvPr id="27" name="Text 25"/>
+          <p:cNvPr id="26" name="Text 24"/>
           <p:cNvSpPr/>
           <p:nvPr/>
         </p:nvSpPr>
@@ -29822,7 +29870,7 @@
       </p:sp>
       <p:sp>
         <p:nvSpPr>
-          <p:cNvPr id="28" name="Shape 26"/>
+          <p:cNvPr id="27" name="Shape 25"/>
           <p:cNvSpPr/>
           <p:nvPr/>
         </p:nvSpPr>
@@ -29849,14 +29897,14 @@
       </p:sp>
       <p:sp>
         <p:nvSpPr>
-          <p:cNvPr id="29" name="Shape 27"/>
-          <p:cNvSpPr/>
-          <p:nvPr/>
-        </p:nvSpPr>
-        <p:spPr>
-          <a:xfrm>
-            <a:off x="1975104" y="3364992"/>
-            <a:ext cx="1554480" cy="475488"/>
+          <p:cNvPr id="28" name="Shape 26"/>
+          <p:cNvSpPr/>
+          <p:nvPr/>
+        </p:nvSpPr>
+        <p:spPr>
+          <a:xfrm>
+            <a:off x="2999232" y="3364992"/>
+            <a:ext cx="1645920" cy="475488"/>
           </a:xfrm>
           <a:prstGeom prst="rect">
             <a:avLst>
@@ -29876,14 +29924,14 @@
       </p:sp>
       <p:sp>
         <p:nvSpPr>
-          <p:cNvPr id="30" name="Text 28"/>
-          <p:cNvSpPr/>
-          <p:nvPr/>
-        </p:nvSpPr>
-        <p:spPr>
-          <a:xfrm>
-            <a:off x="1975104" y="3364992"/>
-            <a:ext cx="1554480" cy="475488"/>
+          <p:cNvPr id="29" name="Text 27"/>
+          <p:cNvSpPr/>
+          <p:nvPr/>
+        </p:nvSpPr>
+        <p:spPr>
+          <a:xfrm>
+            <a:off x="2999232" y="3364992"/>
+            <a:ext cx="1645920" cy="475488"/>
           </a:xfrm>
           <a:prstGeom prst="rect">
             <a:avLst/>
@@ -29907,7 +29955,7 @@
                 <a:ea typeface="Trebuchet MS" pitchFamily="34" charset="-122"/>
                 <a:cs typeface="Trebuchet MS" pitchFamily="34" charset="-120"/>
               </a:rPr>
-              <a:t>fore</a:t>
+              <a:t>seek</a:t>
             </a:r>
             <a:endParaRPr lang="en-US" sz="1400" dirty="0"/>
           </a:p>
@@ -29915,14 +29963,14 @@
       </p:sp>
       <p:sp>
         <p:nvSpPr>
-          <p:cNvPr id="31" name="Text 29"/>
-          <p:cNvSpPr/>
-          <p:nvPr/>
-        </p:nvSpPr>
-        <p:spPr>
-          <a:xfrm>
-            <a:off x="3529584" y="3364992"/>
-            <a:ext cx="73152" cy="475488"/>
+          <p:cNvPr id="30" name="Text 28"/>
+          <p:cNvSpPr/>
+          <p:nvPr/>
+        </p:nvSpPr>
+        <p:spPr>
+          <a:xfrm>
+            <a:off x="4645152" y="3364992"/>
+            <a:ext cx="1097280" cy="475488"/>
           </a:xfrm>
           <a:prstGeom prst="rect">
             <a:avLst/>
@@ -29954,14 +30002,14 @@
       </p:sp>
       <p:sp>
         <p:nvSpPr>
-          <p:cNvPr id="32" name="Shape 30"/>
-          <p:cNvSpPr/>
-          <p:nvPr/>
-        </p:nvSpPr>
-        <p:spPr>
-          <a:xfrm>
-            <a:off x="3602736" y="3364992"/>
-            <a:ext cx="1554480" cy="475488"/>
+          <p:cNvPr id="31" name="Shape 29"/>
+          <p:cNvSpPr/>
+          <p:nvPr/>
+        </p:nvSpPr>
+        <p:spPr>
+          <a:xfrm>
+            <a:off x="5742432" y="3364992"/>
+            <a:ext cx="1645920" cy="475488"/>
           </a:xfrm>
           <a:prstGeom prst="rect">
             <a:avLst>
@@ -29981,14 +30029,14 @@
       </p:sp>
       <p:sp>
         <p:nvSpPr>
-          <p:cNvPr id="33" name="Text 31"/>
-          <p:cNvSpPr/>
-          <p:nvPr/>
-        </p:nvSpPr>
-        <p:spPr>
-          <a:xfrm>
-            <a:off x="3602736" y="3364992"/>
-            <a:ext cx="1554480" cy="475488"/>
+          <p:cNvPr id="32" name="Text 30"/>
+          <p:cNvSpPr/>
+          <p:nvPr/>
+        </p:nvSpPr>
+        <p:spPr>
+          <a:xfrm>
+            <a:off x="5742432" y="3364992"/>
+            <a:ext cx="1645920" cy="475488"/>
           </a:xfrm>
           <a:prstGeom prst="rect">
             <a:avLst/>
@@ -30012,7 +30060,7 @@
                 <a:ea typeface="Trebuchet MS" pitchFamily="34" charset="-122"/>
                 <a:cs typeface="Trebuchet MS" pitchFamily="34" charset="-120"/>
               </a:rPr>
-              <a:t>see</a:t>
+              <a:t>er</a:t>
             </a:r>
             <a:endParaRPr lang="en-US" sz="1400" dirty="0"/>
           </a:p>
@@ -30020,14 +30068,41 @@
       </p:sp>
       <p:sp>
         <p:nvSpPr>
+          <p:cNvPr id="33" name="Shape 31"/>
+          <p:cNvSpPr/>
+          <p:nvPr/>
+        </p:nvSpPr>
+        <p:spPr>
+          <a:xfrm>
+            <a:off x="365760" y="4096512"/>
+            <a:ext cx="1371600" cy="804672"/>
+          </a:xfrm>
+          <a:prstGeom prst="rect">
+            <a:avLst>
+              <a:gd name="adj" fmla="val 6818"/>
+            </a:avLst>
+          </a:prstGeom>
+          <a:solidFill>
+            <a:srgbClr val="E2E8F0"/>
+          </a:solidFill>
+          <a:ln w="12700">
+            <a:solidFill>
+              <a:srgbClr val="E2E8F0"/>
+            </a:solidFill>
+            <a:prstDash val="solid"/>
+          </a:ln>
+        </p:spPr>
+      </p:sp>
+      <p:sp>
+        <p:nvSpPr>
           <p:cNvPr id="34" name="Text 32"/>
           <p:cNvSpPr/>
           <p:nvPr/>
         </p:nvSpPr>
         <p:spPr>
           <a:xfrm>
-            <a:off x="5157216" y="3364992"/>
-            <a:ext cx="73152" cy="475488"/>
+            <a:off x="365760" y="4096512"/>
+            <a:ext cx="1371600" cy="804672"/>
           </a:xfrm>
           <a:prstGeom prst="rect">
             <a:avLst/>
@@ -30043,17 +30118,17 @@
               <a:buNone/>
             </a:pPr>
             <a:r>
-              <a:rPr lang="en-US" sz="1600" b="1" dirty="0">
-                <a:solidFill>
-                  <a:srgbClr val="0D9488"/>
+              <a:rPr lang="en-US" sz="1100" b="1" dirty="0">
+                <a:solidFill>
+                  <a:srgbClr val="475569"/>
                 </a:solidFill>
                 <a:latin typeface="Trebuchet MS" pitchFamily="34" charset="0"/>
                 <a:ea typeface="Trebuchet MS" pitchFamily="34" charset="-122"/>
                 <a:cs typeface="Trebuchet MS" pitchFamily="34" charset="-120"/>
               </a:rPr>
-              <a:t>·</a:t>
-            </a:r>
-            <a:endParaRPr lang="en-US" sz="1600" dirty="0"/>
+              <a:t>Phonemes</a:t>
+            </a:r>
+            <a:endParaRPr lang="en-US" sz="1100" dirty="0"/>
           </a:p>
         </p:txBody>
       </p:sp>
@@ -30065,179 +30140,8 @@
         </p:nvSpPr>
         <p:spPr>
           <a:xfrm>
-            <a:off x="5230368" y="3364992"/>
-            <a:ext cx="1554480" cy="475488"/>
-          </a:xfrm>
-          <a:prstGeom prst="rect">
-            <a:avLst>
-              <a:gd name="adj" fmla="val 9615"/>
-            </a:avLst>
-          </a:prstGeom>
-          <a:solidFill>
-            <a:srgbClr val="FFFFFF"/>
-          </a:solidFill>
-          <a:ln w="12700">
-            <a:solidFill>
-              <a:srgbClr val="0D9488"/>
-            </a:solidFill>
-            <a:prstDash val="solid"/>
-          </a:ln>
-        </p:spPr>
-      </p:sp>
-      <p:sp>
-        <p:nvSpPr>
-          <p:cNvPr id="36" name="Text 34"/>
-          <p:cNvSpPr/>
-          <p:nvPr/>
-        </p:nvSpPr>
-        <p:spPr>
-          <a:xfrm>
-            <a:off x="5230368" y="3364992"/>
-            <a:ext cx="1554480" cy="475488"/>
-          </a:xfrm>
-          <a:prstGeom prst="rect">
-            <a:avLst/>
-          </a:prstGeom>
-          <a:noFill/>
-          <a:ln/>
-        </p:spPr>
-        <p:txBody>
-          <a:bodyPr wrap="square" lIns="0" tIns="0" rIns="0" bIns="0" rtlCol="0" anchor="ctr"/>
-          <a:lstStyle/>
-          <a:p>
-            <a:pPr algn="ctr" indent="0" marL="0">
-              <a:buNone/>
-            </a:pPr>
-            <a:r>
-              <a:rPr lang="en-US" sz="1400" b="1" dirty="0">
-                <a:solidFill>
-                  <a:srgbClr val="0D9488"/>
-                </a:solidFill>
-                <a:latin typeface="Trebuchet MS" pitchFamily="34" charset="0"/>
-                <a:ea typeface="Trebuchet MS" pitchFamily="34" charset="-122"/>
-                <a:cs typeface="Trebuchet MS" pitchFamily="34" charset="-120"/>
-              </a:rPr>
-              <a:t>a</a:t>
-            </a:r>
-            <a:endParaRPr lang="en-US" sz="1400" dirty="0"/>
-          </a:p>
-        </p:txBody>
-      </p:sp>
-      <p:sp>
-        <p:nvSpPr>
-          <p:cNvPr id="37" name="Text 35"/>
-          <p:cNvSpPr/>
-          <p:nvPr/>
-        </p:nvSpPr>
-        <p:spPr>
-          <a:xfrm>
-            <a:off x="6784848" y="3364992"/>
-            <a:ext cx="73152" cy="475488"/>
-          </a:xfrm>
-          <a:prstGeom prst="rect">
-            <a:avLst/>
-          </a:prstGeom>
-          <a:noFill/>
-          <a:ln/>
-        </p:spPr>
-        <p:txBody>
-          <a:bodyPr wrap="square" lIns="0" tIns="0" rIns="0" bIns="0" rtlCol="0" anchor="ctr"/>
-          <a:lstStyle/>
-          <a:p>
-            <a:pPr algn="ctr" indent="0" marL="0">
-              <a:buNone/>
-            </a:pPr>
-            <a:r>
-              <a:rPr lang="en-US" sz="1600" b="1" dirty="0">
-                <a:solidFill>
-                  <a:srgbClr val="0D9488"/>
-                </a:solidFill>
-                <a:latin typeface="Trebuchet MS" pitchFamily="34" charset="0"/>
-                <a:ea typeface="Trebuchet MS" pitchFamily="34" charset="-122"/>
-                <a:cs typeface="Trebuchet MS" pitchFamily="34" charset="-120"/>
-              </a:rPr>
-              <a:t>·</a:t>
-            </a:r>
-            <a:endParaRPr lang="en-US" sz="1600" dirty="0"/>
-          </a:p>
-        </p:txBody>
-      </p:sp>
-      <p:sp>
-        <p:nvSpPr>
-          <p:cNvPr id="38" name="Shape 36"/>
-          <p:cNvSpPr/>
-          <p:nvPr/>
-        </p:nvSpPr>
-        <p:spPr>
-          <a:xfrm>
-            <a:off x="6858000" y="3364992"/>
-            <a:ext cx="1554480" cy="475488"/>
-          </a:xfrm>
-          <a:prstGeom prst="rect">
-            <a:avLst>
-              <a:gd name="adj" fmla="val 9615"/>
-            </a:avLst>
-          </a:prstGeom>
-          <a:solidFill>
-            <a:srgbClr val="FFFFFF"/>
-          </a:solidFill>
-          <a:ln w="12700">
-            <a:solidFill>
-              <a:srgbClr val="0D9488"/>
-            </a:solidFill>
-            <a:prstDash val="solid"/>
-          </a:ln>
-        </p:spPr>
-      </p:sp>
-      <p:sp>
-        <p:nvSpPr>
-          <p:cNvPr id="39" name="Text 37"/>
-          <p:cNvSpPr/>
-          <p:nvPr/>
-        </p:nvSpPr>
-        <p:spPr>
-          <a:xfrm>
-            <a:off x="6858000" y="3364992"/>
-            <a:ext cx="1554480" cy="475488"/>
-          </a:xfrm>
-          <a:prstGeom prst="rect">
-            <a:avLst/>
-          </a:prstGeom>
-          <a:noFill/>
-          <a:ln/>
-        </p:spPr>
-        <p:txBody>
-          <a:bodyPr wrap="square" lIns="0" tIns="0" rIns="0" bIns="0" rtlCol="0" anchor="ctr"/>
-          <a:lstStyle/>
-          <a:p>
-            <a:pPr algn="ctr" indent="0" marL="0">
-              <a:buNone/>
-            </a:pPr>
-            <a:r>
-              <a:rPr lang="en-US" sz="1400" b="1" dirty="0">
-                <a:solidFill>
-                  <a:srgbClr val="0D9488"/>
-                </a:solidFill>
-                <a:latin typeface="Trebuchet MS" pitchFamily="34" charset="0"/>
-                <a:ea typeface="Trebuchet MS" pitchFamily="34" charset="-122"/>
-                <a:cs typeface="Trebuchet MS" pitchFamily="34" charset="-120"/>
-              </a:rPr>
-              <a:t>ble</a:t>
-            </a:r>
-            <a:endParaRPr lang="en-US" sz="1400" dirty="0"/>
-          </a:p>
-        </p:txBody>
-      </p:sp>
-      <p:sp>
-        <p:nvSpPr>
-          <p:cNvPr id="40" name="Shape 38"/>
-          <p:cNvSpPr/>
-          <p:nvPr/>
-        </p:nvSpPr>
-        <p:spPr>
-          <a:xfrm>
-            <a:off x="365760" y="4096512"/>
-            <a:ext cx="1371600" cy="804672"/>
+            <a:off x="1874520" y="4096512"/>
+            <a:ext cx="6903720" cy="804672"/>
           </a:xfrm>
           <a:prstGeom prst="rect">
             <a:avLst>
@@ -30245,85 +30149,19 @@
             </a:avLst>
           </a:prstGeom>
           <a:solidFill>
-            <a:srgbClr val="E2E8F0"/>
+            <a:srgbClr val="F8FAFC"/>
           </a:solidFill>
           <a:ln w="12700">
             <a:solidFill>
               <a:srgbClr val="E2E8F0"/>
             </a:solidFill>
-            <a:prstDash val="solid"/>
-          </a:ln>
-        </p:spPr>
-      </p:sp>
-      <p:sp>
-        <p:nvSpPr>
-          <p:cNvPr id="41" name="Text 39"/>
-          <p:cNvSpPr/>
-          <p:nvPr/>
-        </p:nvSpPr>
-        <p:spPr>
-          <a:xfrm>
-            <a:off x="365760" y="4096512"/>
-            <a:ext cx="1371600" cy="804672"/>
-          </a:xfrm>
-          <a:prstGeom prst="rect">
-            <a:avLst/>
-          </a:prstGeom>
-          <a:noFill/>
-          <a:ln/>
-        </p:spPr>
-        <p:txBody>
-          <a:bodyPr wrap="square" lIns="0" tIns="0" rIns="0" bIns="0" rtlCol="0" anchor="ctr"/>
-          <a:lstStyle/>
-          <a:p>
-            <a:pPr algn="ctr" indent="0" marL="0">
-              <a:buNone/>
-            </a:pPr>
-            <a:r>
-              <a:rPr lang="en-US" sz="1100" b="1" dirty="0">
-                <a:solidFill>
-                  <a:srgbClr val="475569"/>
-                </a:solidFill>
-                <a:latin typeface="Trebuchet MS" pitchFamily="34" charset="0"/>
-                <a:ea typeface="Trebuchet MS" pitchFamily="34" charset="-122"/>
-                <a:cs typeface="Trebuchet MS" pitchFamily="34" charset="-120"/>
-              </a:rPr>
-              <a:t>Phonemes</a:t>
-            </a:r>
-            <a:endParaRPr lang="en-US" sz="1100" dirty="0"/>
-          </a:p>
-        </p:txBody>
-      </p:sp>
-      <p:sp>
-        <p:nvSpPr>
-          <p:cNvPr id="42" name="Shape 40"/>
-          <p:cNvSpPr/>
-          <p:nvPr/>
-        </p:nvSpPr>
-        <p:spPr>
-          <a:xfrm>
-            <a:off x="1874520" y="4096512"/>
-            <a:ext cx="6903720" cy="804672"/>
-          </a:xfrm>
-          <a:prstGeom prst="rect">
-            <a:avLst>
-              <a:gd name="adj" fmla="val 6818"/>
-            </a:avLst>
-          </a:prstGeom>
-          <a:solidFill>
-            <a:srgbClr val="F8FAFC"/>
-          </a:solidFill>
-          <a:ln w="12700">
-            <a:solidFill>
-              <a:srgbClr val="E2E8F0"/>
-            </a:solidFill>
             <a:prstDash val="dash"/>
           </a:ln>
         </p:spPr>
       </p:sp>
       <p:sp>
         <p:nvSpPr>
-          <p:cNvPr id="43" name="Text 41"/>
+          <p:cNvPr id="36" name="Text 34"/>
           <p:cNvSpPr/>
           <p:nvPr/>
         </p:nvSpPr>
@@ -30785,7 +30623,7 @@
                 <a:ea typeface="Trebuchet MS" pitchFamily="34" charset="-122"/>
                 <a:cs typeface="Trebuchet MS" pitchFamily="34" charset="-120"/>
               </a:rPr>
-              <a:t>foreseeable</a:t>
+              <a:t>seeker</a:t>
             </a:r>
             <a:endParaRPr lang="en-US" sz="2800" dirty="0"/>
           </a:p>
@@ -30874,11 +30712,11 @@
             </a:avLst>
           </a:prstGeom>
           <a:solidFill>
-            <a:srgbClr val="DDD6FE"/>
+            <a:srgbClr val="CCFBF1"/>
           </a:solidFill>
           <a:ln w="19050">
             <a:solidFill>
-              <a:srgbClr val="7C3AED"/>
+              <a:srgbClr val="0D9488"/>
             </a:solidFill>
             <a:prstDash val="solid"/>
           </a:ln>
@@ -30918,13 +30756,13 @@
             <a:r>
               <a:rPr lang="en-US" sz="1300" b="1" dirty="0">
                 <a:solidFill>
-                  <a:srgbClr val="4C1D95"/>
+                  <a:srgbClr val="0F766E"/>
                 </a:solidFill>
                 <a:latin typeface="Trebuchet MS" pitchFamily="34" charset="0"/>
                 <a:ea typeface="Trebuchet MS" pitchFamily="34" charset="-122"/>
                 <a:cs typeface="Trebuchet MS" pitchFamily="34" charset="-120"/>
               </a:rPr>
-              <a:t>fore</a:t>
+              <a:t>see</a:t>
             </a:r>
             <a:endParaRPr lang="en-US" sz="1300" dirty="0"/>
           </a:p>
@@ -30963,7 +30801,7 @@
                 <a:ea typeface="Calibri" pitchFamily="34" charset="-122"/>
                 <a:cs typeface="Calibri" pitchFamily="34" charset="-120"/>
               </a:rPr>
-              <a:t>before, in front</a:t>
+              <a:t>to perceive with eyes</a:t>
             </a:r>
             <a:endParaRPr lang="en-US" sz="850" dirty="0"/>
           </a:p>
@@ -30986,11 +30824,11 @@
             </a:avLst>
           </a:prstGeom>
           <a:solidFill>
-            <a:srgbClr val="CCFBF1"/>
+            <a:srgbClr val="FCE7F3"/>
           </a:solidFill>
           <a:ln w="19050">
             <a:solidFill>
-              <a:srgbClr val="0D9488"/>
+              <a:srgbClr val="DB2777"/>
             </a:solidFill>
             <a:prstDash val="solid"/>
           </a:ln>
@@ -31030,13 +30868,13 @@
             <a:r>
               <a:rPr lang="en-US" sz="1300" b="1" dirty="0">
                 <a:solidFill>
-                  <a:srgbClr val="0F766E"/>
+                  <a:srgbClr val="9D174D"/>
                 </a:solidFill>
                 <a:latin typeface="Trebuchet MS" pitchFamily="34" charset="0"/>
                 <a:ea typeface="Trebuchet MS" pitchFamily="34" charset="-122"/>
                 <a:cs typeface="Trebuchet MS" pitchFamily="34" charset="-120"/>
               </a:rPr>
-              <a:t>see</a:t>
+              <a:t>k</a:t>
             </a:r>
             <a:endParaRPr lang="en-US" sz="1300" dirty="0"/>
           </a:p>
@@ -31075,7 +30913,7 @@
                 <a:ea typeface="Calibri" pitchFamily="34" charset="-122"/>
                 <a:cs typeface="Calibri" pitchFamily="34" charset="-120"/>
               </a:rPr>
-              <a:t>to perceive with eyes</a:t>
+              <a:t>variant spelling linking to seek</a:t>
             </a:r>
             <a:endParaRPr lang="en-US" sz="850" dirty="0"/>
           </a:p>
@@ -31148,7 +30986,7 @@
                 <a:ea typeface="Trebuchet MS" pitchFamily="34" charset="-122"/>
                 <a:cs typeface="Trebuchet MS" pitchFamily="34" charset="-120"/>
               </a:rPr>
-              <a:t>able</a:t>
+              <a:t>er</a:t>
             </a:r>
             <a:endParaRPr lang="en-US" sz="1300" dirty="0"/>
           </a:p>
@@ -31187,7 +31025,7 @@
                 <a:ea typeface="Calibri" pitchFamily="34" charset="-122"/>
                 <a:cs typeface="Calibri" pitchFamily="34" charset="-120"/>
               </a:rPr>
-              <a:t>able to be</a:t>
+              <a:t>a person who does something</a:t>
             </a:r>
             <a:endParaRPr lang="en-US" sz="850" dirty="0"/>
           </a:p>
@@ -31195,46 +31033,7 @@
       </p:sp>
       <p:sp>
         <p:nvSpPr>
-          <p:cNvPr id="25" name="Text 23"/>
-          <p:cNvSpPr/>
-          <p:nvPr/>
-        </p:nvSpPr>
-        <p:spPr>
-          <a:xfrm>
-            <a:off x="6519672" y="2752344"/>
-            <a:ext cx="1828800" cy="182880"/>
-          </a:xfrm>
-          <a:prstGeom prst="rect">
-            <a:avLst/>
-          </a:prstGeom>
-          <a:noFill/>
-          <a:ln/>
-        </p:spPr>
-        <p:txBody>
-          <a:bodyPr wrap="square" lIns="0" tIns="0" rIns="0" bIns="0" rtlCol="0" anchor="t"/>
-          <a:lstStyle/>
-          <a:p>
-            <a:pPr algn="ctr" indent="0" marL="0">
-              <a:buNone/>
-            </a:pPr>
-            <a:r>
-              <a:rPr lang="en-US" sz="700" i="1" dirty="0">
-                <a:solidFill>
-                  <a:srgbClr val="94A3B8"/>
-                </a:solidFill>
-                <a:latin typeface="Calibri" pitchFamily="34" charset="0"/>
-                <a:ea typeface="Calibri" pitchFamily="34" charset="-122"/>
-                <a:cs typeface="Calibri" pitchFamily="34" charset="-120"/>
-              </a:rPr>
-              <a:t>'e' dropped before vowel suffix</a:t>
-            </a:r>
-            <a:endParaRPr lang="en-US" sz="700" dirty="0"/>
-          </a:p>
-        </p:txBody>
-      </p:sp>
-      <p:sp>
-        <p:nvSpPr>
-          <p:cNvPr id="26" name="Shape 24"/>
+          <p:cNvPr id="25" name="Shape 23"/>
           <p:cNvSpPr/>
           <p:nvPr/>
         </p:nvSpPr>
@@ -31261,7 +31060,7 @@
       </p:sp>
       <p:sp>
         <p:nvSpPr>
-          <p:cNvPr id="27" name="Text 25"/>
+          <p:cNvPr id="26" name="Text 24"/>
           <p:cNvSpPr/>
           <p:nvPr/>
         </p:nvSpPr>
@@ -31300,7 +31099,7 @@
       </p:sp>
       <p:sp>
         <p:nvSpPr>
-          <p:cNvPr id="28" name="Shape 26"/>
+          <p:cNvPr id="27" name="Shape 25"/>
           <p:cNvSpPr/>
           <p:nvPr/>
         </p:nvSpPr>
@@ -31327,14 +31126,14 @@
       </p:sp>
       <p:sp>
         <p:nvSpPr>
-          <p:cNvPr id="29" name="Shape 27"/>
-          <p:cNvSpPr/>
-          <p:nvPr/>
-        </p:nvSpPr>
-        <p:spPr>
-          <a:xfrm>
-            <a:off x="1975104" y="3364992"/>
-            <a:ext cx="1554480" cy="475488"/>
+          <p:cNvPr id="28" name="Shape 26"/>
+          <p:cNvSpPr/>
+          <p:nvPr/>
+        </p:nvSpPr>
+        <p:spPr>
+          <a:xfrm>
+            <a:off x="2999232" y="3364992"/>
+            <a:ext cx="1645920" cy="475488"/>
           </a:xfrm>
           <a:prstGeom prst="rect">
             <a:avLst>
@@ -31354,14 +31153,14 @@
       </p:sp>
       <p:sp>
         <p:nvSpPr>
-          <p:cNvPr id="30" name="Text 28"/>
-          <p:cNvSpPr/>
-          <p:nvPr/>
-        </p:nvSpPr>
-        <p:spPr>
-          <a:xfrm>
-            <a:off x="1975104" y="3364992"/>
-            <a:ext cx="1554480" cy="475488"/>
+          <p:cNvPr id="29" name="Text 27"/>
+          <p:cNvSpPr/>
+          <p:nvPr/>
+        </p:nvSpPr>
+        <p:spPr>
+          <a:xfrm>
+            <a:off x="2999232" y="3364992"/>
+            <a:ext cx="1645920" cy="475488"/>
           </a:xfrm>
           <a:prstGeom prst="rect">
             <a:avLst/>
@@ -31385,7 +31184,7 @@
                 <a:ea typeface="Trebuchet MS" pitchFamily="34" charset="-122"/>
                 <a:cs typeface="Trebuchet MS" pitchFamily="34" charset="-120"/>
               </a:rPr>
-              <a:t>fore</a:t>
+              <a:t>seek</a:t>
             </a:r>
             <a:endParaRPr lang="en-US" sz="1400" dirty="0"/>
           </a:p>
@@ -31393,14 +31192,14 @@
       </p:sp>
       <p:sp>
         <p:nvSpPr>
-          <p:cNvPr id="31" name="Text 29"/>
-          <p:cNvSpPr/>
-          <p:nvPr/>
-        </p:nvSpPr>
-        <p:spPr>
-          <a:xfrm>
-            <a:off x="3529584" y="3364992"/>
-            <a:ext cx="73152" cy="475488"/>
+          <p:cNvPr id="30" name="Text 28"/>
+          <p:cNvSpPr/>
+          <p:nvPr/>
+        </p:nvSpPr>
+        <p:spPr>
+          <a:xfrm>
+            <a:off x="4645152" y="3364992"/>
+            <a:ext cx="1097280" cy="475488"/>
           </a:xfrm>
           <a:prstGeom prst="rect">
             <a:avLst/>
@@ -31432,14 +31231,14 @@
       </p:sp>
       <p:sp>
         <p:nvSpPr>
-          <p:cNvPr id="32" name="Shape 30"/>
-          <p:cNvSpPr/>
-          <p:nvPr/>
-        </p:nvSpPr>
-        <p:spPr>
-          <a:xfrm>
-            <a:off x="3602736" y="3364992"/>
-            <a:ext cx="1554480" cy="475488"/>
+          <p:cNvPr id="31" name="Shape 29"/>
+          <p:cNvSpPr/>
+          <p:nvPr/>
+        </p:nvSpPr>
+        <p:spPr>
+          <a:xfrm>
+            <a:off x="5742432" y="3364992"/>
+            <a:ext cx="1645920" cy="475488"/>
           </a:xfrm>
           <a:prstGeom prst="rect">
             <a:avLst>
@@ -31459,14 +31258,14 @@
       </p:sp>
       <p:sp>
         <p:nvSpPr>
-          <p:cNvPr id="33" name="Text 31"/>
-          <p:cNvSpPr/>
-          <p:nvPr/>
-        </p:nvSpPr>
-        <p:spPr>
-          <a:xfrm>
-            <a:off x="3602736" y="3364992"/>
-            <a:ext cx="1554480" cy="475488"/>
+          <p:cNvPr id="32" name="Text 30"/>
+          <p:cNvSpPr/>
+          <p:nvPr/>
+        </p:nvSpPr>
+        <p:spPr>
+          <a:xfrm>
+            <a:off x="5742432" y="3364992"/>
+            <a:ext cx="1645920" cy="475488"/>
           </a:xfrm>
           <a:prstGeom prst="rect">
             <a:avLst/>
@@ -31490,7 +31289,7 @@
                 <a:ea typeface="Trebuchet MS" pitchFamily="34" charset="-122"/>
                 <a:cs typeface="Trebuchet MS" pitchFamily="34" charset="-120"/>
               </a:rPr>
-              <a:t>see</a:t>
+              <a:t>er</a:t>
             </a:r>
             <a:endParaRPr lang="en-US" sz="1400" dirty="0"/>
           </a:p>
@@ -31498,14 +31297,41 @@
       </p:sp>
       <p:sp>
         <p:nvSpPr>
+          <p:cNvPr id="33" name="Shape 31"/>
+          <p:cNvSpPr/>
+          <p:nvPr/>
+        </p:nvSpPr>
+        <p:spPr>
+          <a:xfrm>
+            <a:off x="365760" y="4096512"/>
+            <a:ext cx="1371600" cy="804672"/>
+          </a:xfrm>
+          <a:prstGeom prst="rect">
+            <a:avLst>
+              <a:gd name="adj" fmla="val 6818"/>
+            </a:avLst>
+          </a:prstGeom>
+          <a:solidFill>
+            <a:srgbClr val="E2E8F0"/>
+          </a:solidFill>
+          <a:ln w="12700">
+            <a:solidFill>
+              <a:srgbClr val="E2E8F0"/>
+            </a:solidFill>
+            <a:prstDash val="solid"/>
+          </a:ln>
+        </p:spPr>
+      </p:sp>
+      <p:sp>
+        <p:nvSpPr>
           <p:cNvPr id="34" name="Text 32"/>
           <p:cNvSpPr/>
           <p:nvPr/>
         </p:nvSpPr>
         <p:spPr>
           <a:xfrm>
-            <a:off x="5157216" y="3364992"/>
-            <a:ext cx="73152" cy="475488"/>
+            <a:off x="365760" y="4096512"/>
+            <a:ext cx="1371600" cy="804672"/>
           </a:xfrm>
           <a:prstGeom prst="rect">
             <a:avLst/>
@@ -31521,17 +31347,17 @@
               <a:buNone/>
             </a:pPr>
             <a:r>
-              <a:rPr lang="en-US" sz="1600" b="1" dirty="0">
-                <a:solidFill>
-                  <a:srgbClr val="0D9488"/>
+              <a:rPr lang="en-US" sz="1100" b="1" dirty="0">
+                <a:solidFill>
+                  <a:srgbClr val="475569"/>
                 </a:solidFill>
                 <a:latin typeface="Trebuchet MS" pitchFamily="34" charset="0"/>
                 <a:ea typeface="Trebuchet MS" pitchFamily="34" charset="-122"/>
                 <a:cs typeface="Trebuchet MS" pitchFamily="34" charset="-120"/>
               </a:rPr>
-              <a:t>·</a:t>
-            </a:r>
-            <a:endParaRPr lang="en-US" sz="1600" dirty="0"/>
+              <a:t>Phonemes</a:t>
+            </a:r>
+            <a:endParaRPr lang="en-US" sz="1100" dirty="0"/>
           </a:p>
         </p:txBody>
       </p:sp>
@@ -31543,35 +31369,62 @@
         </p:nvSpPr>
         <p:spPr>
           <a:xfrm>
-            <a:off x="5230368" y="3364992"/>
-            <a:ext cx="1554480" cy="475488"/>
+            <a:off x="1874520" y="4096512"/>
+            <a:ext cx="6903720" cy="658368"/>
           </a:xfrm>
           <a:prstGeom prst="rect">
             <a:avLst>
-              <a:gd name="adj" fmla="val 9615"/>
+              <a:gd name="adj" fmla="val 8333"/>
             </a:avLst>
           </a:prstGeom>
           <a:solidFill>
+            <a:srgbClr val="FCE7F3"/>
+          </a:solidFill>
+          <a:ln w="12700">
+            <a:solidFill>
+              <a:srgbClr val="DB2777"/>
+            </a:solidFill>
+            <a:prstDash val="solid"/>
+          </a:ln>
+        </p:spPr>
+      </p:sp>
+      <p:sp>
+        <p:nvSpPr>
+          <p:cNvPr id="36" name="Shape 34"/>
+          <p:cNvSpPr/>
+          <p:nvPr/>
+        </p:nvSpPr>
+        <p:spPr>
+          <a:xfrm>
+            <a:off x="2670048" y="4169664"/>
+            <a:ext cx="685800" cy="475488"/>
+          </a:xfrm>
+          <a:prstGeom prst="rect">
+            <a:avLst>
+              <a:gd name="adj" fmla="val 7692"/>
+            </a:avLst>
+          </a:prstGeom>
+          <a:solidFill>
             <a:srgbClr val="FFFFFF"/>
           </a:solidFill>
           <a:ln w="12700">
             <a:solidFill>
-              <a:srgbClr val="0D9488"/>
-            </a:solidFill>
-            <a:prstDash val="solid"/>
-          </a:ln>
-        </p:spPr>
-      </p:sp>
-      <p:sp>
-        <p:nvSpPr>
-          <p:cNvPr id="36" name="Text 34"/>
-          <p:cNvSpPr/>
-          <p:nvPr/>
-        </p:nvSpPr>
-        <p:spPr>
-          <a:xfrm>
-            <a:off x="5230368" y="3364992"/>
-            <a:ext cx="1554480" cy="475488"/>
+              <a:srgbClr val="DB2777"/>
+            </a:solidFill>
+            <a:prstDash val="solid"/>
+          </a:ln>
+        </p:spPr>
+      </p:sp>
+      <p:sp>
+        <p:nvSpPr>
+          <p:cNvPr id="37" name="Text 35"/>
+          <p:cNvSpPr/>
+          <p:nvPr/>
+        </p:nvSpPr>
+        <p:spPr>
+          <a:xfrm>
+            <a:off x="2670048" y="4169664"/>
+            <a:ext cx="685800" cy="475488"/>
           </a:xfrm>
           <a:prstGeom prst="rect">
             <a:avLst/>
@@ -31587,30 +31440,57 @@
               <a:buNone/>
             </a:pPr>
             <a:r>
-              <a:rPr lang="en-US" sz="1400" b="1" dirty="0">
-                <a:solidFill>
-                  <a:srgbClr val="0D9488"/>
+              <a:rPr lang="en-US" sz="900" b="1" dirty="0">
+                <a:solidFill>
+                  <a:srgbClr val="9D174D"/>
                 </a:solidFill>
                 <a:latin typeface="Trebuchet MS" pitchFamily="34" charset="0"/>
                 <a:ea typeface="Trebuchet MS" pitchFamily="34" charset="-122"/>
                 <a:cs typeface="Trebuchet MS" pitchFamily="34" charset="-120"/>
               </a:rPr>
-              <a:t>a</a:t>
-            </a:r>
-            <a:endParaRPr lang="en-US" sz="1400" dirty="0"/>
-          </a:p>
-        </p:txBody>
-      </p:sp>
-      <p:sp>
-        <p:nvSpPr>
-          <p:cNvPr id="37" name="Text 35"/>
-          <p:cNvSpPr/>
-          <p:nvPr/>
-        </p:nvSpPr>
-        <p:spPr>
-          <a:xfrm>
-            <a:off x="6784848" y="3364992"/>
-            <a:ext cx="73152" cy="475488"/>
+              <a:t>s</a:t>
+            </a:r>
+            <a:endParaRPr lang="en-US" sz="900" dirty="0"/>
+          </a:p>
+        </p:txBody>
+      </p:sp>
+      <p:sp>
+        <p:nvSpPr>
+          <p:cNvPr id="38" name="Shape 36"/>
+          <p:cNvSpPr/>
+          <p:nvPr/>
+        </p:nvSpPr>
+        <p:spPr>
+          <a:xfrm>
+            <a:off x="4123944" y="4169664"/>
+            <a:ext cx="685800" cy="475488"/>
+          </a:xfrm>
+          <a:prstGeom prst="rect">
+            <a:avLst>
+              <a:gd name="adj" fmla="val 7692"/>
+            </a:avLst>
+          </a:prstGeom>
+          <a:solidFill>
+            <a:srgbClr val="FFFFFF"/>
+          </a:solidFill>
+          <a:ln w="12700">
+            <a:solidFill>
+              <a:srgbClr val="DB2777"/>
+            </a:solidFill>
+            <a:prstDash val="solid"/>
+          </a:ln>
+        </p:spPr>
+      </p:sp>
+      <p:sp>
+        <p:nvSpPr>
+          <p:cNvPr id="39" name="Text 37"/>
+          <p:cNvSpPr/>
+          <p:nvPr/>
+        </p:nvSpPr>
+        <p:spPr>
+          <a:xfrm>
+            <a:off x="4123944" y="4169664"/>
+            <a:ext cx="685800" cy="475488"/>
           </a:xfrm>
           <a:prstGeom prst="rect">
             <a:avLst/>
@@ -31626,34 +31506,34 @@
               <a:buNone/>
             </a:pPr>
             <a:r>
-              <a:rPr lang="en-US" sz="1600" b="1" dirty="0">
-                <a:solidFill>
-                  <a:srgbClr val="0D9488"/>
+              <a:rPr lang="en-US" sz="900" b="1" dirty="0">
+                <a:solidFill>
+                  <a:srgbClr val="9D174D"/>
                 </a:solidFill>
                 <a:latin typeface="Trebuchet MS" pitchFamily="34" charset="0"/>
                 <a:ea typeface="Trebuchet MS" pitchFamily="34" charset="-122"/>
                 <a:cs typeface="Trebuchet MS" pitchFamily="34" charset="-120"/>
               </a:rPr>
-              <a:t>·</a:t>
-            </a:r>
-            <a:endParaRPr lang="en-US" sz="1600" dirty="0"/>
-          </a:p>
-        </p:txBody>
-      </p:sp>
-      <p:sp>
-        <p:nvSpPr>
-          <p:cNvPr id="38" name="Shape 36"/>
-          <p:cNvSpPr/>
-          <p:nvPr/>
-        </p:nvSpPr>
-        <p:spPr>
-          <a:xfrm>
-            <a:off x="6858000" y="3364992"/>
-            <a:ext cx="1554480" cy="475488"/>
+              <a:t>ee</a:t>
+            </a:r>
+            <a:endParaRPr lang="en-US" sz="900" dirty="0"/>
+          </a:p>
+        </p:txBody>
+      </p:sp>
+      <p:sp>
+        <p:nvSpPr>
+          <p:cNvPr id="40" name="Shape 38"/>
+          <p:cNvSpPr/>
+          <p:nvPr/>
+        </p:nvSpPr>
+        <p:spPr>
+          <a:xfrm>
+            <a:off x="5577840" y="4169664"/>
+            <a:ext cx="685800" cy="475488"/>
           </a:xfrm>
           <a:prstGeom prst="rect">
             <a:avLst>
-              <a:gd name="adj" fmla="val 9615"/>
+              <a:gd name="adj" fmla="val 7692"/>
             </a:avLst>
           </a:prstGeom>
           <a:solidFill>
@@ -31661,22 +31541,22 @@
           </a:solidFill>
           <a:ln w="12700">
             <a:solidFill>
-              <a:srgbClr val="0D9488"/>
-            </a:solidFill>
-            <a:prstDash val="solid"/>
-          </a:ln>
-        </p:spPr>
-      </p:sp>
-      <p:sp>
-        <p:nvSpPr>
-          <p:cNvPr id="39" name="Text 37"/>
-          <p:cNvSpPr/>
-          <p:nvPr/>
-        </p:nvSpPr>
-        <p:spPr>
-          <a:xfrm>
-            <a:off x="6858000" y="3364992"/>
-            <a:ext cx="1554480" cy="475488"/>
+              <a:srgbClr val="DB2777"/>
+            </a:solidFill>
+            <a:prstDash val="solid"/>
+          </a:ln>
+        </p:spPr>
+      </p:sp>
+      <p:sp>
+        <p:nvSpPr>
+          <p:cNvPr id="41" name="Text 39"/>
+          <p:cNvSpPr/>
+          <p:nvPr/>
+        </p:nvSpPr>
+        <p:spPr>
+          <a:xfrm>
+            <a:off x="5577840" y="4169664"/>
+            <a:ext cx="685800" cy="475488"/>
           </a:xfrm>
           <a:prstGeom prst="rect">
             <a:avLst/>
@@ -31692,57 +31572,57 @@
               <a:buNone/>
             </a:pPr>
             <a:r>
-              <a:rPr lang="en-US" sz="1400" b="1" dirty="0">
-                <a:solidFill>
-                  <a:srgbClr val="0D9488"/>
+              <a:rPr lang="en-US" sz="900" b="1" dirty="0">
+                <a:solidFill>
+                  <a:srgbClr val="9D174D"/>
                 </a:solidFill>
                 <a:latin typeface="Trebuchet MS" pitchFamily="34" charset="0"/>
                 <a:ea typeface="Trebuchet MS" pitchFamily="34" charset="-122"/>
                 <a:cs typeface="Trebuchet MS" pitchFamily="34" charset="-120"/>
               </a:rPr>
-              <a:t>ble</a:t>
-            </a:r>
-            <a:endParaRPr lang="en-US" sz="1400" dirty="0"/>
-          </a:p>
-        </p:txBody>
-      </p:sp>
-      <p:sp>
-        <p:nvSpPr>
-          <p:cNvPr id="40" name="Shape 38"/>
-          <p:cNvSpPr/>
-          <p:nvPr/>
-        </p:nvSpPr>
-        <p:spPr>
-          <a:xfrm>
-            <a:off x="365760" y="4096512"/>
-            <a:ext cx="1371600" cy="804672"/>
+              <a:t>k</a:t>
+            </a:r>
+            <a:endParaRPr lang="en-US" sz="900" dirty="0"/>
+          </a:p>
+        </p:txBody>
+      </p:sp>
+      <p:sp>
+        <p:nvSpPr>
+          <p:cNvPr id="42" name="Shape 40"/>
+          <p:cNvSpPr/>
+          <p:nvPr/>
+        </p:nvSpPr>
+        <p:spPr>
+          <a:xfrm>
+            <a:off x="7031736" y="4169664"/>
+            <a:ext cx="685800" cy="475488"/>
           </a:xfrm>
           <a:prstGeom prst="rect">
             <a:avLst>
-              <a:gd name="adj" fmla="val 6818"/>
+              <a:gd name="adj" fmla="val 7692"/>
             </a:avLst>
           </a:prstGeom>
           <a:solidFill>
-            <a:srgbClr val="E2E8F0"/>
-          </a:solidFill>
-          <a:ln w="12700">
-            <a:solidFill>
-              <a:srgbClr val="E2E8F0"/>
-            </a:solidFill>
-            <a:prstDash val="solid"/>
-          </a:ln>
-        </p:spPr>
-      </p:sp>
-      <p:sp>
-        <p:nvSpPr>
-          <p:cNvPr id="41" name="Text 39"/>
-          <p:cNvSpPr/>
-          <p:nvPr/>
-        </p:nvSpPr>
-        <p:spPr>
-          <a:xfrm>
-            <a:off x="365760" y="4096512"/>
-            <a:ext cx="1371600" cy="804672"/>
+            <a:srgbClr val="FFFFFF"/>
+          </a:solidFill>
+          <a:ln w="12700">
+            <a:solidFill>
+              <a:srgbClr val="DB2777"/>
+            </a:solidFill>
+            <a:prstDash val="solid"/>
+          </a:ln>
+        </p:spPr>
+      </p:sp>
+      <p:sp>
+        <p:nvSpPr>
+          <p:cNvPr id="43" name="Text 41"/>
+          <p:cNvSpPr/>
+          <p:nvPr/>
+        </p:nvSpPr>
+        <p:spPr>
+          <a:xfrm>
+            <a:off x="7031736" y="4169664"/>
+            <a:ext cx="685800" cy="475488"/>
           </a:xfrm>
           <a:prstGeom prst="rect">
             <a:avLst/>
@@ -31758,504 +31638,15 @@
               <a:buNone/>
             </a:pPr>
             <a:r>
-              <a:rPr lang="en-US" sz="1100" b="1" dirty="0">
-                <a:solidFill>
-                  <a:srgbClr val="475569"/>
+              <a:rPr lang="en-US" sz="900" b="1" dirty="0">
+                <a:solidFill>
+                  <a:srgbClr val="9D174D"/>
                 </a:solidFill>
                 <a:latin typeface="Trebuchet MS" pitchFamily="34" charset="0"/>
                 <a:ea typeface="Trebuchet MS" pitchFamily="34" charset="-122"/>
                 <a:cs typeface="Trebuchet MS" pitchFamily="34" charset="-120"/>
               </a:rPr>
-              <a:t>Phonemes</a:t>
-            </a:r>
-            <a:endParaRPr lang="en-US" sz="1100" dirty="0"/>
-          </a:p>
-        </p:txBody>
-      </p:sp>
-      <p:sp>
-        <p:nvSpPr>
-          <p:cNvPr id="42" name="Shape 40"/>
-          <p:cNvSpPr/>
-          <p:nvPr/>
-        </p:nvSpPr>
-        <p:spPr>
-          <a:xfrm>
-            <a:off x="1874520" y="4096512"/>
-            <a:ext cx="6903720" cy="658368"/>
-          </a:xfrm>
-          <a:prstGeom prst="rect">
-            <a:avLst>
-              <a:gd name="adj" fmla="val 8333"/>
-            </a:avLst>
-          </a:prstGeom>
-          <a:solidFill>
-            <a:srgbClr val="FCE7F3"/>
-          </a:solidFill>
-          <a:ln w="12700">
-            <a:solidFill>
-              <a:srgbClr val="DB2777"/>
-            </a:solidFill>
-            <a:prstDash val="solid"/>
-          </a:ln>
-        </p:spPr>
-      </p:sp>
-      <p:sp>
-        <p:nvSpPr>
-          <p:cNvPr id="43" name="Shape 41"/>
-          <p:cNvSpPr/>
-          <p:nvPr/>
-        </p:nvSpPr>
-        <p:spPr>
-          <a:xfrm>
-            <a:off x="2124837" y="4169664"/>
-            <a:ext cx="685800" cy="475488"/>
-          </a:xfrm>
-          <a:prstGeom prst="rect">
-            <a:avLst>
-              <a:gd name="adj" fmla="val 7692"/>
-            </a:avLst>
-          </a:prstGeom>
-          <a:solidFill>
-            <a:srgbClr val="FFFFFF"/>
-          </a:solidFill>
-          <a:ln w="12700">
-            <a:solidFill>
-              <a:srgbClr val="DB2777"/>
-            </a:solidFill>
-            <a:prstDash val="solid"/>
-          </a:ln>
-        </p:spPr>
-      </p:sp>
-      <p:sp>
-        <p:nvSpPr>
-          <p:cNvPr id="44" name="Text 42"/>
-          <p:cNvSpPr/>
-          <p:nvPr/>
-        </p:nvSpPr>
-        <p:spPr>
-          <a:xfrm>
-            <a:off x="2124837" y="4169664"/>
-            <a:ext cx="685800" cy="475488"/>
-          </a:xfrm>
-          <a:prstGeom prst="rect">
-            <a:avLst/>
-          </a:prstGeom>
-          <a:noFill/>
-          <a:ln/>
-        </p:spPr>
-        <p:txBody>
-          <a:bodyPr wrap="square" lIns="0" tIns="0" rIns="0" bIns="0" rtlCol="0" anchor="ctr"/>
-          <a:lstStyle/>
-          <a:p>
-            <a:pPr algn="ctr" indent="0" marL="0">
-              <a:buNone/>
-            </a:pPr>
-            <a:r>
-              <a:rPr lang="en-US" sz="900" b="1" dirty="0">
-                <a:solidFill>
-                  <a:srgbClr val="9D174D"/>
-                </a:solidFill>
-                <a:latin typeface="Trebuchet MS" pitchFamily="34" charset="0"/>
-                <a:ea typeface="Trebuchet MS" pitchFamily="34" charset="-122"/>
-                <a:cs typeface="Trebuchet MS" pitchFamily="34" charset="-120"/>
-              </a:rPr>
-              <a:t>f</a:t>
-            </a:r>
-            <a:endParaRPr lang="en-US" sz="900" dirty="0"/>
-          </a:p>
-        </p:txBody>
-      </p:sp>
-      <p:sp>
-        <p:nvSpPr>
-          <p:cNvPr id="45" name="Shape 43"/>
-          <p:cNvSpPr/>
-          <p:nvPr/>
-        </p:nvSpPr>
-        <p:spPr>
-          <a:xfrm>
-            <a:off x="3033522" y="4169664"/>
-            <a:ext cx="685800" cy="475488"/>
-          </a:xfrm>
-          <a:prstGeom prst="rect">
-            <a:avLst>
-              <a:gd name="adj" fmla="val 7692"/>
-            </a:avLst>
-          </a:prstGeom>
-          <a:solidFill>
-            <a:srgbClr val="FFFFFF"/>
-          </a:solidFill>
-          <a:ln w="12700">
-            <a:solidFill>
-              <a:srgbClr val="DB2777"/>
-            </a:solidFill>
-            <a:prstDash val="solid"/>
-          </a:ln>
-        </p:spPr>
-      </p:sp>
-      <p:sp>
-        <p:nvSpPr>
-          <p:cNvPr id="46" name="Text 44"/>
-          <p:cNvSpPr/>
-          <p:nvPr/>
-        </p:nvSpPr>
-        <p:spPr>
-          <a:xfrm>
-            <a:off x="3033522" y="4169664"/>
-            <a:ext cx="685800" cy="475488"/>
-          </a:xfrm>
-          <a:prstGeom prst="rect">
-            <a:avLst/>
-          </a:prstGeom>
-          <a:noFill/>
-          <a:ln/>
-        </p:spPr>
-        <p:txBody>
-          <a:bodyPr wrap="square" lIns="0" tIns="0" rIns="0" bIns="0" rtlCol="0" anchor="ctr"/>
-          <a:lstStyle/>
-          <a:p>
-            <a:pPr algn="ctr" indent="0" marL="0">
-              <a:buNone/>
-            </a:pPr>
-            <a:r>
-              <a:rPr lang="en-US" sz="900" b="1" dirty="0">
-                <a:solidFill>
-                  <a:srgbClr val="9D174D"/>
-                </a:solidFill>
-                <a:latin typeface="Trebuchet MS" pitchFamily="34" charset="0"/>
-                <a:ea typeface="Trebuchet MS" pitchFamily="34" charset="-122"/>
-                <a:cs typeface="Trebuchet MS" pitchFamily="34" charset="-120"/>
-              </a:rPr>
-              <a:t>or</a:t>
-            </a:r>
-            <a:endParaRPr lang="en-US" sz="900" dirty="0"/>
-          </a:p>
-        </p:txBody>
-      </p:sp>
-      <p:sp>
-        <p:nvSpPr>
-          <p:cNvPr id="47" name="Shape 45"/>
-          <p:cNvSpPr/>
-          <p:nvPr/>
-        </p:nvSpPr>
-        <p:spPr>
-          <a:xfrm>
-            <a:off x="3942207" y="4169664"/>
-            <a:ext cx="685800" cy="475488"/>
-          </a:xfrm>
-          <a:prstGeom prst="rect">
-            <a:avLst>
-              <a:gd name="adj" fmla="val 7692"/>
-            </a:avLst>
-          </a:prstGeom>
-          <a:solidFill>
-            <a:srgbClr val="FFFFFF"/>
-          </a:solidFill>
-          <a:ln w="12700">
-            <a:solidFill>
-              <a:srgbClr val="DB2777"/>
-            </a:solidFill>
-            <a:prstDash val="solid"/>
-          </a:ln>
-        </p:spPr>
-      </p:sp>
-      <p:sp>
-        <p:nvSpPr>
-          <p:cNvPr id="48" name="Text 46"/>
-          <p:cNvSpPr/>
-          <p:nvPr/>
-        </p:nvSpPr>
-        <p:spPr>
-          <a:xfrm>
-            <a:off x="3942207" y="4169664"/>
-            <a:ext cx="685800" cy="475488"/>
-          </a:xfrm>
-          <a:prstGeom prst="rect">
-            <a:avLst/>
-          </a:prstGeom>
-          <a:noFill/>
-          <a:ln/>
-        </p:spPr>
-        <p:txBody>
-          <a:bodyPr wrap="square" lIns="0" tIns="0" rIns="0" bIns="0" rtlCol="0" anchor="ctr"/>
-          <a:lstStyle/>
-          <a:p>
-            <a:pPr algn="ctr" indent="0" marL="0">
-              <a:buNone/>
-            </a:pPr>
-            <a:r>
-              <a:rPr lang="en-US" sz="900" b="1" dirty="0">
-                <a:solidFill>
-                  <a:srgbClr val="9D174D"/>
-                </a:solidFill>
-                <a:latin typeface="Trebuchet MS" pitchFamily="34" charset="0"/>
-                <a:ea typeface="Trebuchet MS" pitchFamily="34" charset="-122"/>
-                <a:cs typeface="Trebuchet MS" pitchFamily="34" charset="-120"/>
-              </a:rPr>
-              <a:t>s</a:t>
-            </a:r>
-            <a:endParaRPr lang="en-US" sz="900" dirty="0"/>
-          </a:p>
-        </p:txBody>
-      </p:sp>
-      <p:sp>
-        <p:nvSpPr>
-          <p:cNvPr id="49" name="Shape 47"/>
-          <p:cNvSpPr/>
-          <p:nvPr/>
-        </p:nvSpPr>
-        <p:spPr>
-          <a:xfrm>
-            <a:off x="4850892" y="4169664"/>
-            <a:ext cx="685800" cy="475488"/>
-          </a:xfrm>
-          <a:prstGeom prst="rect">
-            <a:avLst>
-              <a:gd name="adj" fmla="val 7692"/>
-            </a:avLst>
-          </a:prstGeom>
-          <a:solidFill>
-            <a:srgbClr val="FFFFFF"/>
-          </a:solidFill>
-          <a:ln w="12700">
-            <a:solidFill>
-              <a:srgbClr val="DB2777"/>
-            </a:solidFill>
-            <a:prstDash val="solid"/>
-          </a:ln>
-        </p:spPr>
-      </p:sp>
-      <p:sp>
-        <p:nvSpPr>
-          <p:cNvPr id="50" name="Text 48"/>
-          <p:cNvSpPr/>
-          <p:nvPr/>
-        </p:nvSpPr>
-        <p:spPr>
-          <a:xfrm>
-            <a:off x="4850892" y="4169664"/>
-            <a:ext cx="685800" cy="475488"/>
-          </a:xfrm>
-          <a:prstGeom prst="rect">
-            <a:avLst/>
-          </a:prstGeom>
-          <a:noFill/>
-          <a:ln/>
-        </p:spPr>
-        <p:txBody>
-          <a:bodyPr wrap="square" lIns="0" tIns="0" rIns="0" bIns="0" rtlCol="0" anchor="ctr"/>
-          <a:lstStyle/>
-          <a:p>
-            <a:pPr algn="ctr" indent="0" marL="0">
-              <a:buNone/>
-            </a:pPr>
-            <a:r>
-              <a:rPr lang="en-US" sz="900" b="1" dirty="0">
-                <a:solidFill>
-                  <a:srgbClr val="9D174D"/>
-                </a:solidFill>
-                <a:latin typeface="Trebuchet MS" pitchFamily="34" charset="0"/>
-                <a:ea typeface="Trebuchet MS" pitchFamily="34" charset="-122"/>
-                <a:cs typeface="Trebuchet MS" pitchFamily="34" charset="-120"/>
-              </a:rPr>
-              <a:t>ee</a:t>
-            </a:r>
-            <a:endParaRPr lang="en-US" sz="900" dirty="0"/>
-          </a:p>
-        </p:txBody>
-      </p:sp>
-      <p:sp>
-        <p:nvSpPr>
-          <p:cNvPr id="51" name="Shape 49"/>
-          <p:cNvSpPr/>
-          <p:nvPr/>
-        </p:nvSpPr>
-        <p:spPr>
-          <a:xfrm>
-            <a:off x="5759577" y="4169664"/>
-            <a:ext cx="685800" cy="475488"/>
-          </a:xfrm>
-          <a:prstGeom prst="rect">
-            <a:avLst>
-              <a:gd name="adj" fmla="val 7692"/>
-            </a:avLst>
-          </a:prstGeom>
-          <a:solidFill>
-            <a:srgbClr val="FFFFFF"/>
-          </a:solidFill>
-          <a:ln w="12700">
-            <a:solidFill>
-              <a:srgbClr val="DB2777"/>
-            </a:solidFill>
-            <a:prstDash val="solid"/>
-          </a:ln>
-        </p:spPr>
-      </p:sp>
-      <p:sp>
-        <p:nvSpPr>
-          <p:cNvPr id="52" name="Text 50"/>
-          <p:cNvSpPr/>
-          <p:nvPr/>
-        </p:nvSpPr>
-        <p:spPr>
-          <a:xfrm>
-            <a:off x="5759577" y="4169664"/>
-            <a:ext cx="685800" cy="475488"/>
-          </a:xfrm>
-          <a:prstGeom prst="rect">
-            <a:avLst/>
-          </a:prstGeom>
-          <a:noFill/>
-          <a:ln/>
-        </p:spPr>
-        <p:txBody>
-          <a:bodyPr wrap="square" lIns="0" tIns="0" rIns="0" bIns="0" rtlCol="0" anchor="ctr"/>
-          <a:lstStyle/>
-          <a:p>
-            <a:pPr algn="ctr" indent="0" marL="0">
-              <a:buNone/>
-            </a:pPr>
-            <a:r>
-              <a:rPr lang="en-US" sz="900" b="1" dirty="0">
-                <a:solidFill>
-                  <a:srgbClr val="9D174D"/>
-                </a:solidFill>
-                <a:latin typeface="Trebuchet MS" pitchFamily="34" charset="0"/>
-                <a:ea typeface="Trebuchet MS" pitchFamily="34" charset="-122"/>
-                <a:cs typeface="Trebuchet MS" pitchFamily="34" charset="-120"/>
-              </a:rPr>
-              <a:t>a</a:t>
-            </a:r>
-            <a:endParaRPr lang="en-US" sz="900" dirty="0"/>
-          </a:p>
-        </p:txBody>
-      </p:sp>
-      <p:sp>
-        <p:nvSpPr>
-          <p:cNvPr id="53" name="Shape 51"/>
-          <p:cNvSpPr/>
-          <p:nvPr/>
-        </p:nvSpPr>
-        <p:spPr>
-          <a:xfrm>
-            <a:off x="6668262" y="4169664"/>
-            <a:ext cx="685800" cy="475488"/>
-          </a:xfrm>
-          <a:prstGeom prst="rect">
-            <a:avLst>
-              <a:gd name="adj" fmla="val 7692"/>
-            </a:avLst>
-          </a:prstGeom>
-          <a:solidFill>
-            <a:srgbClr val="FFFFFF"/>
-          </a:solidFill>
-          <a:ln w="12700">
-            <a:solidFill>
-              <a:srgbClr val="DB2777"/>
-            </a:solidFill>
-            <a:prstDash val="solid"/>
-          </a:ln>
-        </p:spPr>
-      </p:sp>
-      <p:sp>
-        <p:nvSpPr>
-          <p:cNvPr id="54" name="Text 52"/>
-          <p:cNvSpPr/>
-          <p:nvPr/>
-        </p:nvSpPr>
-        <p:spPr>
-          <a:xfrm>
-            <a:off x="6668262" y="4169664"/>
-            <a:ext cx="685800" cy="475488"/>
-          </a:xfrm>
-          <a:prstGeom prst="rect">
-            <a:avLst/>
-          </a:prstGeom>
-          <a:noFill/>
-          <a:ln/>
-        </p:spPr>
-        <p:txBody>
-          <a:bodyPr wrap="square" lIns="0" tIns="0" rIns="0" bIns="0" rtlCol="0" anchor="ctr"/>
-          <a:lstStyle/>
-          <a:p>
-            <a:pPr algn="ctr" indent="0" marL="0">
-              <a:buNone/>
-            </a:pPr>
-            <a:r>
-              <a:rPr lang="en-US" sz="900" b="1" dirty="0">
-                <a:solidFill>
-                  <a:srgbClr val="9D174D"/>
-                </a:solidFill>
-                <a:latin typeface="Trebuchet MS" pitchFamily="34" charset="0"/>
-                <a:ea typeface="Trebuchet MS" pitchFamily="34" charset="-122"/>
-                <a:cs typeface="Trebuchet MS" pitchFamily="34" charset="-120"/>
-              </a:rPr>
-              <a:t>b</a:t>
-            </a:r>
-            <a:endParaRPr lang="en-US" sz="900" dirty="0"/>
-          </a:p>
-        </p:txBody>
-      </p:sp>
-      <p:sp>
-        <p:nvSpPr>
-          <p:cNvPr id="55" name="Shape 53"/>
-          <p:cNvSpPr/>
-          <p:nvPr/>
-        </p:nvSpPr>
-        <p:spPr>
-          <a:xfrm>
-            <a:off x="7576947" y="4169664"/>
-            <a:ext cx="685800" cy="475488"/>
-          </a:xfrm>
-          <a:prstGeom prst="rect">
-            <a:avLst>
-              <a:gd name="adj" fmla="val 7692"/>
-            </a:avLst>
-          </a:prstGeom>
-          <a:solidFill>
-            <a:srgbClr val="FFFFFF"/>
-          </a:solidFill>
-          <a:ln w="12700">
-            <a:solidFill>
-              <a:srgbClr val="DB2777"/>
-            </a:solidFill>
-            <a:prstDash val="solid"/>
-          </a:ln>
-        </p:spPr>
-      </p:sp>
-      <p:sp>
-        <p:nvSpPr>
-          <p:cNvPr id="56" name="Text 54"/>
-          <p:cNvSpPr/>
-          <p:nvPr/>
-        </p:nvSpPr>
-        <p:spPr>
-          <a:xfrm>
-            <a:off x="7576947" y="4169664"/>
-            <a:ext cx="685800" cy="475488"/>
-          </a:xfrm>
-          <a:prstGeom prst="rect">
-            <a:avLst/>
-          </a:prstGeom>
-          <a:noFill/>
-          <a:ln/>
-        </p:spPr>
-        <p:txBody>
-          <a:bodyPr wrap="square" lIns="0" tIns="0" rIns="0" bIns="0" rtlCol="0" anchor="ctr"/>
-          <a:lstStyle/>
-          <a:p>
-            <a:pPr algn="ctr" indent="0" marL="0">
-              <a:buNone/>
-            </a:pPr>
-            <a:r>
-              <a:rPr lang="en-US" sz="900" b="1" dirty="0">
-                <a:solidFill>
-                  <a:srgbClr val="9D174D"/>
-                </a:solidFill>
-                <a:latin typeface="Trebuchet MS" pitchFamily="34" charset="0"/>
-                <a:ea typeface="Trebuchet MS" pitchFamily="34" charset="-122"/>
-                <a:cs typeface="Trebuchet MS" pitchFamily="34" charset="-120"/>
-              </a:rPr>
-              <a:t>le</a:t>
+              <a:t>er</a:t>
             </a:r>
             <a:endParaRPr lang="en-US" sz="900" dirty="0"/>
           </a:p>
@@ -34451,7 +33842,7 @@
                 <a:ea typeface="Trebuchet MS" pitchFamily="34" charset="-122"/>
                 <a:cs typeface="Trebuchet MS" pitchFamily="34" charset="-120"/>
               </a:rPr>
-              <a:t>-r</a:t>
+              <a:t>-er</a:t>
             </a:r>
             <a:endParaRPr lang="en-US" sz="1300" dirty="0"/>
           </a:p>
@@ -34668,7 +34059,7 @@
                 <a:ea typeface="Trebuchet MS" pitchFamily="34" charset="-122"/>
                 <a:cs typeface="Trebuchet MS" pitchFamily="34" charset="-120"/>
               </a:rPr>
-              <a:t>in-</a:t>
+              <a:t>un-</a:t>
             </a:r>
             <a:endParaRPr lang="en-US" sz="1300" dirty="0"/>
           </a:p>
@@ -34994,7 +34385,7 @@
                 <a:ea typeface="Trebuchet MS" pitchFamily="34" charset="-122"/>
                 <a:cs typeface="Trebuchet MS" pitchFamily="34" charset="-120"/>
               </a:rPr>
-              <a:t>seen</a:t>
+              <a:t>seeing</a:t>
             </a:r>
             <a:endParaRPr lang="en-US" sz="1200" dirty="0"/>
           </a:p>
@@ -35060,7 +34451,7 @@
                 <a:ea typeface="Trebuchet MS" pitchFamily="34" charset="-122"/>
                 <a:cs typeface="Trebuchet MS" pitchFamily="34" charset="-120"/>
               </a:rPr>
-              <a:t>seeing</a:t>
+              <a:t>seen</a:t>
             </a:r>
             <a:endParaRPr lang="en-US" sz="1200" dirty="0"/>
           </a:p>
@@ -35126,7 +34517,7 @@
                 <a:ea typeface="Trebuchet MS" pitchFamily="34" charset="-122"/>
                 <a:cs typeface="Trebuchet MS" pitchFamily="34" charset="-120"/>
               </a:rPr>
-              <a:t>seer</a:t>
+              <a:t>seeker</a:t>
             </a:r>
             <a:endParaRPr lang="en-US" sz="1200" dirty="0"/>
           </a:p>
@@ -35258,7 +34649,7 @@
                 <a:ea typeface="Trebuchet MS" pitchFamily="34" charset="-122"/>
                 <a:cs typeface="Trebuchet MS" pitchFamily="34" charset="-120"/>
               </a:rPr>
-              <a:t>unseeing</a:t>
+              <a:t>unseen</a:t>
             </a:r>
             <a:endParaRPr lang="en-US" sz="1200" dirty="0"/>
           </a:p>
@@ -35324,7 +34715,7 @@
                 <a:ea typeface="Trebuchet MS" pitchFamily="34" charset="-122"/>
                 <a:cs typeface="Trebuchet MS" pitchFamily="34" charset="-120"/>
               </a:rPr>
-              <a:t>foreseeable</a:t>
+              <a:t>bystander</a:t>
             </a:r>
             <a:endParaRPr lang="en-US" sz="1200" dirty="0"/>
           </a:p>
@@ -36512,7 +35903,7 @@
                 <a:ea typeface="Calibri" pitchFamily="34" charset="-122"/>
                 <a:cs typeface="Calibri" pitchFamily="34" charset="-120"/>
               </a:rPr>
-              <a:t>1.  The word 'foresee' means to predict something will happen before it does.</a:t>
+              <a:t>1.  The root 'see' comes from the Greek word for light.</a:t>
             </a:r>
             <a:endParaRPr lang="en-US" sz="1300" dirty="0"/>
           </a:p>
@@ -36535,11 +35926,11 @@
             </a:avLst>
           </a:prstGeom>
           <a:solidFill>
-            <a:srgbClr val="DCFCE7"/>
-          </a:solidFill>
-          <a:ln w="12700">
-            <a:solidFill>
-              <a:srgbClr val="16A34A"/>
+            <a:srgbClr val="FEE2E2"/>
+          </a:solidFill>
+          <a:ln w="12700">
+            <a:solidFill>
+              <a:srgbClr val="DC2626"/>
             </a:solidFill>
             <a:prstDash val="solid"/>
           </a:ln>
@@ -36572,13 +35963,13 @@
             <a:r>
               <a:rPr lang="en-US" sz="1100" b="1" dirty="0">
                 <a:solidFill>
-                  <a:srgbClr val="16A34A"/>
+                  <a:srgbClr val="DC2626"/>
                 </a:solidFill>
                 <a:latin typeface="Trebuchet MS" pitchFamily="34" charset="0"/>
                 <a:ea typeface="Trebuchet MS" pitchFamily="34" charset="-122"/>
                 <a:cs typeface="Trebuchet MS" pitchFamily="34" charset="-120"/>
               </a:rPr>
-              <a:t>TRUE</a:t>
+              <a:t>FALSE</a:t>
             </a:r>
             <a:endParaRPr lang="en-US" sz="1100" dirty="0"/>
           </a:p>
@@ -36651,7 +36042,7 @@
                 <a:ea typeface="Calibri" pitchFamily="34" charset="-122"/>
                 <a:cs typeface="Calibri" pitchFamily="34" charset="-120"/>
               </a:rPr>
-              <a:t>2.  The root 'see' comes from the Greek word for light.</a:t>
+              <a:t>2.  The word 'oversee' means to watch over and supervise something.</a:t>
             </a:r>
             <a:endParaRPr lang="en-US" sz="1300" dirty="0"/>
           </a:p>
@@ -36674,11 +36065,11 @@
             </a:avLst>
           </a:prstGeom>
           <a:solidFill>
-            <a:srgbClr val="FEE2E2"/>
-          </a:solidFill>
-          <a:ln w="12700">
-            <a:solidFill>
-              <a:srgbClr val="DC2626"/>
+            <a:srgbClr val="DCFCE7"/>
+          </a:solidFill>
+          <a:ln w="12700">
+            <a:solidFill>
+              <a:srgbClr val="16A34A"/>
             </a:solidFill>
             <a:prstDash val="solid"/>
           </a:ln>
@@ -36711,13 +36102,13 @@
             <a:r>
               <a:rPr lang="en-US" sz="1100" b="1" dirty="0">
                 <a:solidFill>
-                  <a:srgbClr val="DC2626"/>
+                  <a:srgbClr val="16A34A"/>
                 </a:solidFill>
                 <a:latin typeface="Trebuchet MS" pitchFamily="34" charset="0"/>
                 <a:ea typeface="Trebuchet MS" pitchFamily="34" charset="-122"/>
                 <a:cs typeface="Trebuchet MS" pitchFamily="34" charset="-120"/>
               </a:rPr>
-              <a:t>FALSE</a:t>
+              <a:t>TRUE</a:t>
             </a:r>
             <a:endParaRPr lang="en-US" sz="1100" dirty="0"/>
           </a:p>
@@ -36790,7 +36181,7 @@
                 <a:ea typeface="Calibri" pitchFamily="34" charset="-122"/>
                 <a:cs typeface="Calibri" pitchFamily="34" charset="-120"/>
               </a:rPr>
-              <a:t>3.  The word 'oversee' contains the root 'see' meaning to perceive with eyes.</a:t>
+              <a:t>3.  The root 'see' is only ever used at the end of a word.</a:t>
             </a:r>
             <a:endParaRPr lang="en-US" sz="1300" dirty="0"/>
           </a:p>
@@ -36813,11 +36204,11 @@
             </a:avLst>
           </a:prstGeom>
           <a:solidFill>
-            <a:srgbClr val="DCFCE7"/>
-          </a:solidFill>
-          <a:ln w="12700">
-            <a:solidFill>
-              <a:srgbClr val="16A34A"/>
+            <a:srgbClr val="FEE2E2"/>
+          </a:solidFill>
+          <a:ln w="12700">
+            <a:solidFill>
+              <a:srgbClr val="DC2626"/>
             </a:solidFill>
             <a:prstDash val="solid"/>
           </a:ln>
@@ -36850,13 +36241,13 @@
             <a:r>
               <a:rPr lang="en-US" sz="1100" b="1" dirty="0">
                 <a:solidFill>
-                  <a:srgbClr val="16A34A"/>
+                  <a:srgbClr val="DC2626"/>
                 </a:solidFill>
                 <a:latin typeface="Trebuchet MS" pitchFamily="34" charset="0"/>
                 <a:ea typeface="Trebuchet MS" pitchFamily="34" charset="-122"/>
                 <a:cs typeface="Trebuchet MS" pitchFamily="34" charset="-120"/>
               </a:rPr>
-              <a:t>TRUE</a:t>
+              <a:t>FALSE</a:t>
             </a:r>
             <a:endParaRPr lang="en-US" sz="1100" dirty="0"/>
           </a:p>
@@ -36929,7 +36320,7 @@
                 <a:ea typeface="Calibri" pitchFamily="34" charset="-122"/>
                 <a:cs typeface="Calibri" pitchFamily="34" charset="-120"/>
               </a:rPr>
-              <a:t>4.  A 'seer' is someone who is said to see into the future.</a:t>
+              <a:t>4.  The word 'foresee' uses the root 'see' to mean predicting or knowing something before it happens.</a:t>
             </a:r>
             <a:endParaRPr lang="en-US" sz="1300" dirty="0"/>
           </a:p>
@@ -37068,7 +36459,7 @@
                 <a:ea typeface="Calibri" pitchFamily="34" charset="-122"/>
                 <a:cs typeface="Calibri" pitchFamily="34" charset="-120"/>
               </a:rPr>
-              <a:t>5.  The word 'seek' has no connection to the root 'see'.</a:t>
+              <a:t>5.  The word 'unseen' contains the prefix 'un-' meaning not.</a:t>
             </a:r>
             <a:endParaRPr lang="en-US" sz="1300" dirty="0"/>
           </a:p>
@@ -37091,11 +36482,11 @@
             </a:avLst>
           </a:prstGeom>
           <a:solidFill>
-            <a:srgbClr val="FEE2E2"/>
-          </a:solidFill>
-          <a:ln w="12700">
-            <a:solidFill>
-              <a:srgbClr val="DC2626"/>
+            <a:srgbClr val="DCFCE7"/>
+          </a:solidFill>
+          <a:ln w="12700">
+            <a:solidFill>
+              <a:srgbClr val="16A34A"/>
             </a:solidFill>
             <a:prstDash val="solid"/>
           </a:ln>
@@ -37128,13 +36519,13 @@
             <a:r>
               <a:rPr lang="en-US" sz="1100" b="1" dirty="0">
                 <a:solidFill>
-                  <a:srgbClr val="DC2626"/>
+                  <a:srgbClr val="16A34A"/>
                 </a:solidFill>
                 <a:latin typeface="Trebuchet MS" pitchFamily="34" charset="0"/>
                 <a:ea typeface="Trebuchet MS" pitchFamily="34" charset="-122"/>
                 <a:cs typeface="Trebuchet MS" pitchFamily="34" charset="-120"/>
               </a:rPr>
-              <a:t>FALSE</a:t>
+              <a:t>TRUE</a:t>
             </a:r>
             <a:endParaRPr lang="en-US" sz="1100" dirty="0"/>
           </a:p>
@@ -37839,7 +37230,7 @@
                 <a:ea typeface="Trebuchet MS" pitchFamily="34" charset="-122"/>
                 <a:cs typeface="Trebuchet MS" pitchFamily="34" charset="-120"/>
               </a:rPr>
-              <a:t>seen</a:t>
+              <a:t>seeing</a:t>
             </a:r>
             <a:endParaRPr lang="en-US" sz="1300" dirty="0"/>
           </a:p>
@@ -37905,7 +37296,7 @@
                 <a:ea typeface="Trebuchet MS" pitchFamily="34" charset="-122"/>
                 <a:cs typeface="Trebuchet MS" pitchFamily="34" charset="-120"/>
               </a:rPr>
-              <a:t>seeing</a:t>
+              <a:t>seen</a:t>
             </a:r>
             <a:endParaRPr lang="en-US" sz="1300" dirty="0"/>
           </a:p>
@@ -37971,7 +37362,7 @@
                 <a:ea typeface="Trebuchet MS" pitchFamily="34" charset="-122"/>
                 <a:cs typeface="Trebuchet MS" pitchFamily="34" charset="-120"/>
               </a:rPr>
-              <a:t>seer</a:t>
+              <a:t>seeker</a:t>
             </a:r>
             <a:endParaRPr lang="en-US" sz="1300" dirty="0"/>
           </a:p>
@@ -38103,7 +37494,7 @@
                 <a:ea typeface="Trebuchet MS" pitchFamily="34" charset="-122"/>
                 <a:cs typeface="Trebuchet MS" pitchFamily="34" charset="-120"/>
               </a:rPr>
-              <a:t>unseeing</a:t>
+              <a:t>unseen</a:t>
             </a:r>
             <a:endParaRPr lang="en-US" sz="1300" dirty="0"/>
           </a:p>
@@ -39130,7 +38521,7 @@
                 <a:ea typeface="Trebuchet MS" pitchFamily="34" charset="-122"/>
                 <a:cs typeface="Trebuchet MS" pitchFamily="34" charset="-120"/>
               </a:rPr>
-              <a:t>-r</a:t>
+              <a:t>-er</a:t>
             </a:r>
             <a:endParaRPr lang="en-US" sz="1300" dirty="0"/>
           </a:p>
@@ -39347,7 +38738,7 @@
                 <a:ea typeface="Trebuchet MS" pitchFamily="34" charset="-122"/>
                 <a:cs typeface="Trebuchet MS" pitchFamily="34" charset="-120"/>
               </a:rPr>
-              <a:t>in-</a:t>
+              <a:t>un-</a:t>
             </a:r>
             <a:endParaRPr lang="en-US" sz="1300" dirty="0"/>
           </a:p>
@@ -40347,7 +39738,7 @@
                 <a:ea typeface="Calibri" pitchFamily="34" charset="-122"/>
                 <a:cs typeface="Calibri" pitchFamily="34" charset="-120"/>
               </a:rPr>
-              <a:t>Looking at something but not really noticing or understanding it.</a:t>
+              <a:t>Something that has not been noticed or looked at.</a:t>
             </a:r>
             <a:endParaRPr lang="en-US" sz="1200" dirty="0"/>
           </a:p>
@@ -40486,7 +39877,7 @@
                 <a:ea typeface="Calibri" pitchFamily="34" charset="-122"/>
                 <a:cs typeface="Calibri" pitchFamily="34" charset="-120"/>
               </a:rPr>
-              <a:t>A person who is said to be able to predict the future.</a:t>
+              <a:t>A person who is trying to find something.</a:t>
             </a:r>
             <a:endParaRPr lang="en-US" sz="1200" dirty="0"/>
           </a:p>
@@ -40559,7 +39950,7 @@
                 <a:ea typeface="Trebuchet MS" pitchFamily="34" charset="-122"/>
                 <a:cs typeface="Trebuchet MS" pitchFamily="34" charset="-120"/>
               </a:rPr>
-              <a:t>seen</a:t>
+              <a:t>seeing</a:t>
             </a:r>
             <a:endParaRPr lang="en-US" sz="1200" dirty="0"/>
           </a:p>
@@ -40625,7 +40016,7 @@
                 <a:ea typeface="Calibri" pitchFamily="34" charset="-122"/>
                 <a:cs typeface="Calibri" pitchFamily="34" charset="-120"/>
               </a:rPr>
-              <a:t>The act of looking at or noticing something right now.</a:t>
+              <a:t>Having looked at or noticed something in the past.</a:t>
             </a:r>
             <a:endParaRPr lang="en-US" sz="1200" dirty="0"/>
           </a:p>
@@ -40698,7 +40089,7 @@
                 <a:ea typeface="Trebuchet MS" pitchFamily="34" charset="-122"/>
                 <a:cs typeface="Trebuchet MS" pitchFamily="34" charset="-120"/>
               </a:rPr>
-              <a:t>seeing</a:t>
+              <a:t>seen</a:t>
             </a:r>
             <a:endParaRPr lang="en-US" sz="1200" dirty="0"/>
           </a:p>
@@ -40764,7 +40155,7 @@
                 <a:ea typeface="Calibri" pitchFamily="34" charset="-122"/>
                 <a:cs typeface="Calibri" pitchFamily="34" charset="-120"/>
               </a:rPr>
-              <a:t>To look for something or try to find it.</a:t>
+              <a:t>To search or look carefully for something.</a:t>
             </a:r>
             <a:endParaRPr lang="en-US" sz="1200" dirty="0"/>
           </a:p>
@@ -40837,7 +40228,7 @@
                 <a:ea typeface="Trebuchet MS" pitchFamily="34" charset="-122"/>
                 <a:cs typeface="Trebuchet MS" pitchFamily="34" charset="-120"/>
               </a:rPr>
-              <a:t>seer</a:t>
+              <a:t>seeker</a:t>
             </a:r>
             <a:endParaRPr lang="en-US" sz="1200" dirty="0"/>
           </a:p>
@@ -40903,7 +40294,7 @@
                 <a:ea typeface="Calibri" pitchFamily="34" charset="-122"/>
                 <a:cs typeface="Calibri" pitchFamily="34" charset="-120"/>
               </a:rPr>
-              <a:t>When you have already looked at or noticed something.</a:t>
+              <a:t>Using your eyes to look at or notice something.</a:t>
             </a:r>
             <a:endParaRPr lang="en-US" sz="1200" dirty="0"/>
           </a:p>
@@ -41115,7 +40506,7 @@
                 <a:ea typeface="Trebuchet MS" pitchFamily="34" charset="-122"/>
                 <a:cs typeface="Trebuchet MS" pitchFamily="34" charset="-120"/>
               </a:rPr>
-              <a:t>unseeing</a:t>
+              <a:t>unseen</a:t>
             </a:r>
             <a:endParaRPr lang="en-US" sz="1200" dirty="0"/>
           </a:p>
@@ -41181,7 +40572,7 @@
                 <a:ea typeface="Calibri" pitchFamily="34" charset="-122"/>
                 <a:cs typeface="Calibri" pitchFamily="34" charset="-120"/>
               </a:rPr>
-              <a:t>To watch over and make sure something is done properly.</a:t>
+              <a:t>To watch over and make sure a job or task is done properly.</a:t>
             </a:r>
             <a:endParaRPr lang="en-US" sz="1200" dirty="0"/>
           </a:p>
@@ -41676,7 +41067,7 @@
                 <a:ea typeface="Calibri" pitchFamily="34" charset="-122"/>
                 <a:cs typeface="Calibri" pitchFamily="34" charset="-120"/>
               </a:rPr>
-              <a:t>Our teacher will oversee the science experiment to make sure everyone stays safe.</a:t>
+              <a:t>The teacher asked a student to oversee the classroom while she stepped outside for a moment.</a:t>
             </a:r>
             <a:endParaRPr lang="en-US" sz="1500" dirty="0"/>
           </a:p>
@@ -41840,7 +41231,7 @@
                 <a:ea typeface="Calibri" pitchFamily="34" charset="-122"/>
                 <a:cs typeface="Calibri" pitchFamily="34" charset="-120"/>
               </a:rPr>
-              <a:t>It was hard to foresee that the weather would change so quickly during our excursion.</a:t>
+              <a:t>Nobody could foresee that the school sports day would be cancelled due to heavy rain.</a:t>
             </a:r>
             <a:endParaRPr lang="en-US" sz="1500" dirty="0"/>
           </a:p>
@@ -42004,7 +41395,7 @@
                 <a:ea typeface="Calibri" pitchFamily="34" charset="-122"/>
                 <a:cs typeface="Calibri" pitchFamily="34" charset="-120"/>
               </a:rPr>
-              <a:t>The ancient seer was believed to have the power to predict coming events.</a:t>
+              <a:t>The treasure remained unseen for hundreds of years until a young explorer found it.</a:t>
             </a:r>
             <a:endParaRPr lang="en-US" sz="1500" dirty="0"/>
           </a:p>

--- a/output/wordlabs-see-3day.pptx
+++ b/output/wordlabs-see-3day.pptx
@@ -10445,7 +10445,7 @@
         </p:nvSpPr>
         <p:spPr>
           <a:xfrm>
-            <a:off x="2670048" y="4169664"/>
+            <a:off x="2427732" y="4169664"/>
             <a:ext cx="685800" cy="475488"/>
           </a:xfrm>
           <a:prstGeom prst="rect">
@@ -10472,7 +10472,7 @@
         </p:nvSpPr>
         <p:spPr>
           <a:xfrm>
-            <a:off x="2670048" y="4169664"/>
+            <a:off x="2427732" y="4169664"/>
             <a:ext cx="685800" cy="475488"/>
           </a:xfrm>
           <a:prstGeom prst="rect">
@@ -10511,7 +10511,7 @@
         </p:nvSpPr>
         <p:spPr>
           <a:xfrm>
-            <a:off x="4123944" y="4169664"/>
+            <a:off x="3639312" y="4169664"/>
             <a:ext cx="685800" cy="475488"/>
           </a:xfrm>
           <a:prstGeom prst="rect">
@@ -10538,7 +10538,7 @@
         </p:nvSpPr>
         <p:spPr>
           <a:xfrm>
-            <a:off x="4123944" y="4169664"/>
+            <a:off x="3639312" y="4169664"/>
             <a:ext cx="685800" cy="475488"/>
           </a:xfrm>
           <a:prstGeom prst="rect">
@@ -10577,7 +10577,7 @@
         </p:nvSpPr>
         <p:spPr>
           <a:xfrm>
-            <a:off x="5577840" y="4169664"/>
+            <a:off x="4850892" y="4169664"/>
             <a:ext cx="685800" cy="475488"/>
           </a:xfrm>
           <a:prstGeom prst="rect">
@@ -10604,7 +10604,7 @@
         </p:nvSpPr>
         <p:spPr>
           <a:xfrm>
-            <a:off x="5577840" y="4169664"/>
+            <a:off x="4850892" y="4169664"/>
             <a:ext cx="685800" cy="475488"/>
           </a:xfrm>
           <a:prstGeom prst="rect">
@@ -10629,7 +10629,7 @@
                 <a:ea typeface="Trebuchet MS" pitchFamily="34" charset="-122"/>
                 <a:cs typeface="Trebuchet MS" pitchFamily="34" charset="-120"/>
               </a:rPr>
-              <a:t>s</a:t>
+              <a:t>e</a:t>
             </a:r>
             <a:endParaRPr lang="en-US" sz="900" dirty="0"/>
           </a:p>
@@ -10643,7 +10643,7 @@
         </p:nvSpPr>
         <p:spPr>
           <a:xfrm>
-            <a:off x="7031736" y="4169664"/>
+            <a:off x="6062472" y="4169664"/>
             <a:ext cx="685800" cy="475488"/>
           </a:xfrm>
           <a:prstGeom prst="rect">
@@ -10670,7 +10670,73 @@
         </p:nvSpPr>
         <p:spPr>
           <a:xfrm>
-            <a:off x="7031736" y="4169664"/>
+            <a:off x="6062472" y="4169664"/>
+            <a:ext cx="685800" cy="475488"/>
+          </a:xfrm>
+          <a:prstGeom prst="rect">
+            <a:avLst/>
+          </a:prstGeom>
+          <a:noFill/>
+          <a:ln/>
+        </p:spPr>
+        <p:txBody>
+          <a:bodyPr wrap="square" lIns="0" tIns="0" rIns="0" bIns="0" rtlCol="0" anchor="ctr"/>
+          <a:lstStyle/>
+          <a:p>
+            <a:pPr algn="ctr" indent="0" marL="0">
+              <a:buNone/>
+            </a:pPr>
+            <a:r>
+              <a:rPr lang="en-US" sz="900" b="1" dirty="0">
+                <a:solidFill>
+                  <a:srgbClr val="9D174D"/>
+                </a:solidFill>
+                <a:latin typeface="Trebuchet MS" pitchFamily="34" charset="0"/>
+                <a:ea typeface="Trebuchet MS" pitchFamily="34" charset="-122"/>
+                <a:cs typeface="Trebuchet MS" pitchFamily="34" charset="-120"/>
+              </a:rPr>
+              <a:t>s</a:t>
+            </a:r>
+            <a:endParaRPr lang="en-US" sz="900" dirty="0"/>
+          </a:p>
+        </p:txBody>
+      </p:sp>
+      <p:sp>
+        <p:nvSpPr>
+          <p:cNvPr id="41" name="Shape 39"/>
+          <p:cNvSpPr/>
+          <p:nvPr/>
+        </p:nvSpPr>
+        <p:spPr>
+          <a:xfrm>
+            <a:off x="7274052" y="4169664"/>
+            <a:ext cx="685800" cy="475488"/>
+          </a:xfrm>
+          <a:prstGeom prst="rect">
+            <a:avLst>
+              <a:gd name="adj" fmla="val 7692"/>
+            </a:avLst>
+          </a:prstGeom>
+          <a:solidFill>
+            <a:srgbClr val="FFFFFF"/>
+          </a:solidFill>
+          <a:ln w="12700">
+            <a:solidFill>
+              <a:srgbClr val="DB2777"/>
+            </a:solidFill>
+            <a:prstDash val="solid"/>
+          </a:ln>
+        </p:spPr>
+      </p:sp>
+      <p:sp>
+        <p:nvSpPr>
+          <p:cNvPr id="42" name="Text 40"/>
+          <p:cNvSpPr/>
+          <p:nvPr/>
+        </p:nvSpPr>
+        <p:spPr>
+          <a:xfrm>
+            <a:off x="7274052" y="4169664"/>
             <a:ext cx="685800" cy="475488"/>
           </a:xfrm>
           <a:prstGeom prst="rect">
@@ -35903,7 +35969,7 @@
                 <a:ea typeface="Calibri" pitchFamily="34" charset="-122"/>
                 <a:cs typeface="Calibri" pitchFamily="34" charset="-120"/>
               </a:rPr>
-              <a:t>1.  The root 'see' comes from the Greek word for light.</a:t>
+              <a:t>1.  The root 'see' is only ever used at the end of a word.</a:t>
             </a:r>
             <a:endParaRPr lang="en-US" sz="1300" dirty="0"/>
           </a:p>
@@ -36042,7 +36108,7 @@
                 <a:ea typeface="Calibri" pitchFamily="34" charset="-122"/>
                 <a:cs typeface="Calibri" pitchFamily="34" charset="-120"/>
               </a:rPr>
-              <a:t>2.  The word 'oversee' means to watch over and supervise something.</a:t>
+              <a:t>2.  The word 'foresee' uses the root 'see' to mean predicting or knowing something before it happens.</a:t>
             </a:r>
             <a:endParaRPr lang="en-US" sz="1300" dirty="0"/>
           </a:p>
@@ -36181,7 +36247,7 @@
                 <a:ea typeface="Calibri" pitchFamily="34" charset="-122"/>
                 <a:cs typeface="Calibri" pitchFamily="34" charset="-120"/>
               </a:rPr>
-              <a:t>3.  The root 'see' is only ever used at the end of a word.</a:t>
+              <a:t>3.  The word 'oversee' means to watch over and supervise something.</a:t>
             </a:r>
             <a:endParaRPr lang="en-US" sz="1300" dirty="0"/>
           </a:p>
@@ -36204,11 +36270,11 @@
             </a:avLst>
           </a:prstGeom>
           <a:solidFill>
-            <a:srgbClr val="FEE2E2"/>
-          </a:solidFill>
-          <a:ln w="12700">
-            <a:solidFill>
-              <a:srgbClr val="DC2626"/>
+            <a:srgbClr val="DCFCE7"/>
+          </a:solidFill>
+          <a:ln w="12700">
+            <a:solidFill>
+              <a:srgbClr val="16A34A"/>
             </a:solidFill>
             <a:prstDash val="solid"/>
           </a:ln>
@@ -36241,13 +36307,13 @@
             <a:r>
               <a:rPr lang="en-US" sz="1100" b="1" dirty="0">
                 <a:solidFill>
-                  <a:srgbClr val="DC2626"/>
+                  <a:srgbClr val="16A34A"/>
                 </a:solidFill>
                 <a:latin typeface="Trebuchet MS" pitchFamily="34" charset="0"/>
                 <a:ea typeface="Trebuchet MS" pitchFamily="34" charset="-122"/>
                 <a:cs typeface="Trebuchet MS" pitchFamily="34" charset="-120"/>
               </a:rPr>
-              <a:t>FALSE</a:t>
+              <a:t>TRUE</a:t>
             </a:r>
             <a:endParaRPr lang="en-US" sz="1100" dirty="0"/>
           </a:p>
@@ -36320,7 +36386,7 @@
                 <a:ea typeface="Calibri" pitchFamily="34" charset="-122"/>
                 <a:cs typeface="Calibri" pitchFamily="34" charset="-120"/>
               </a:rPr>
-              <a:t>4.  The word 'foresee' uses the root 'see' to mean predicting or knowing something before it happens.</a:t>
+              <a:t>4.  The root 'see' comes from the Greek word for light.</a:t>
             </a:r>
             <a:endParaRPr lang="en-US" sz="1300" dirty="0"/>
           </a:p>
@@ -36343,11 +36409,11 @@
             </a:avLst>
           </a:prstGeom>
           <a:solidFill>
-            <a:srgbClr val="DCFCE7"/>
-          </a:solidFill>
-          <a:ln w="12700">
-            <a:solidFill>
-              <a:srgbClr val="16A34A"/>
+            <a:srgbClr val="FEE2E2"/>
+          </a:solidFill>
+          <a:ln w="12700">
+            <a:solidFill>
+              <a:srgbClr val="DC2626"/>
             </a:solidFill>
             <a:prstDash val="solid"/>
           </a:ln>
@@ -36380,13 +36446,13 @@
             <a:r>
               <a:rPr lang="en-US" sz="1100" b="1" dirty="0">
                 <a:solidFill>
-                  <a:srgbClr val="16A34A"/>
+                  <a:srgbClr val="DC2626"/>
                 </a:solidFill>
                 <a:latin typeface="Trebuchet MS" pitchFamily="34" charset="0"/>
                 <a:ea typeface="Trebuchet MS" pitchFamily="34" charset="-122"/>
                 <a:cs typeface="Trebuchet MS" pitchFamily="34" charset="-120"/>
               </a:rPr>
-              <a:t>TRUE</a:t>
+              <a:t>FALSE</a:t>
             </a:r>
             <a:endParaRPr lang="en-US" sz="1100" dirty="0"/>
           </a:p>
